--- a/output_visuals/powerpoint/05_landfire_disturbance_by_year.pptx
+++ b/output_visuals/powerpoint/05_landfire_disturbance_by_year.pptx
@@ -2297,21 +2297,21 @@
           </p:nvSpPr>
           <p:spPr>
             <a:xfrm>
-              <a:off x="1329762" y="5427742"/>
-              <a:ext cx="5242184" cy="0"/>
+              <a:off x="1329762" y="5423503"/>
+              <a:ext cx="4262039" cy="0"/>
             </a:xfrm>
             <a:custGeom>
               <a:avLst/>
               <a:pathLst>
-                <a:path w="5242184" h="0">
+                <a:path w="4262039" h="0">
                   <a:moveTo>
                     <a:pt x="0" y="0"/>
                   </a:moveTo>
                   <a:lnTo>
-                    <a:pt x="5242184" y="0"/>
-                  </a:lnTo>
-                  <a:lnTo>
-                    <a:pt x="5242184" y="0"/>
+                    <a:pt x="4262039" y="0"/>
+                  </a:lnTo>
+                  <a:lnTo>
+                    <a:pt x="4262039" y="0"/>
                   </a:lnTo>
                 </a:path>
               </a:pathLst>
@@ -2340,21 +2340,21 @@
           </p:nvSpPr>
           <p:spPr>
             <a:xfrm>
-              <a:off x="1329762" y="4016396"/>
-              <a:ext cx="5242184" cy="0"/>
+              <a:off x="1329762" y="4488105"/>
+              <a:ext cx="4262039" cy="0"/>
             </a:xfrm>
             <a:custGeom>
               <a:avLst/>
               <a:pathLst>
-                <a:path w="5242184" h="0">
+                <a:path w="4262039" h="0">
                   <a:moveTo>
                     <a:pt x="0" y="0"/>
                   </a:moveTo>
                   <a:lnTo>
-                    <a:pt x="5242184" y="0"/>
-                  </a:lnTo>
-                  <a:lnTo>
-                    <a:pt x="5242184" y="0"/>
+                    <a:pt x="4262039" y="0"/>
+                  </a:lnTo>
+                  <a:lnTo>
+                    <a:pt x="4262039" y="0"/>
                   </a:lnTo>
                 </a:path>
               </a:pathLst>
@@ -2383,21 +2383,21 @@
           </p:nvSpPr>
           <p:spPr>
             <a:xfrm>
-              <a:off x="1329762" y="2605050"/>
-              <a:ext cx="5242184" cy="0"/>
+              <a:off x="1329762" y="3552707"/>
+              <a:ext cx="4262039" cy="0"/>
             </a:xfrm>
             <a:custGeom>
               <a:avLst/>
               <a:pathLst>
-                <a:path w="5242184" h="0">
+                <a:path w="4262039" h="0">
                   <a:moveTo>
                     <a:pt x="0" y="0"/>
                   </a:moveTo>
                   <a:lnTo>
-                    <a:pt x="5242184" y="0"/>
-                  </a:lnTo>
-                  <a:lnTo>
-                    <a:pt x="5242184" y="0"/>
+                    <a:pt x="4262039" y="0"/>
+                  </a:lnTo>
+                  <a:lnTo>
+                    <a:pt x="4262039" y="0"/>
                   </a:lnTo>
                 </a:path>
               </a:pathLst>
@@ -2426,7 +2426,93 @@
           </p:nvSpPr>
           <p:spPr>
             <a:xfrm>
-              <a:off x="1568043" y="1681489"/>
+              <a:off x="1329762" y="2617309"/>
+              <a:ext cx="4262039" cy="0"/>
+            </a:xfrm>
+            <a:custGeom>
+              <a:avLst/>
+              <a:pathLst>
+                <a:path w="4262039" h="0">
+                  <a:moveTo>
+                    <a:pt x="0" y="0"/>
+                  </a:moveTo>
+                  <a:lnTo>
+                    <a:pt x="4262039" y="0"/>
+                  </a:lnTo>
+                  <a:lnTo>
+                    <a:pt x="4262039" y="0"/>
+                  </a:lnTo>
+                </a:path>
+              </a:pathLst>
+            </a:custGeom>
+            <a:ln w="22173" cap="flat">
+              <a:solidFill>
+                <a:srgbClr val="EBEBEB">
+                  <a:alpha val="100000"/>
+                </a:srgbClr>
+              </a:solidFill>
+              <a:prstDash val="solid"/>
+              <a:round/>
+            </a:ln>
+          </p:spPr>
+          <p:txBody>
+            <a:bodyPr/>
+            <a:lstStyle/>
+            <a:p/>
+          </p:txBody>
+        </p:sp>
+        <p:sp>
+          <p:nvSpPr>
+            <p:cNvPr id="9" name="pl9"/>
+            <p:cNvSpPr/>
+            <p:nvPr/>
+          </p:nvSpPr>
+          <p:spPr>
+            <a:xfrm>
+              <a:off x="1329762" y="1681911"/>
+              <a:ext cx="4262039" cy="0"/>
+            </a:xfrm>
+            <a:custGeom>
+              <a:avLst/>
+              <a:pathLst>
+                <a:path w="4262039" h="0">
+                  <a:moveTo>
+                    <a:pt x="0" y="0"/>
+                  </a:moveTo>
+                  <a:lnTo>
+                    <a:pt x="4262039" y="0"/>
+                  </a:lnTo>
+                  <a:lnTo>
+                    <a:pt x="4262039" y="0"/>
+                  </a:lnTo>
+                </a:path>
+              </a:pathLst>
+            </a:custGeom>
+            <a:ln w="22173" cap="flat">
+              <a:solidFill>
+                <a:srgbClr val="EBEBEB">
+                  <a:alpha val="100000"/>
+                </a:srgbClr>
+              </a:solidFill>
+              <a:prstDash val="solid"/>
+              <a:round/>
+            </a:ln>
+          </p:spPr>
+          <p:txBody>
+            <a:bodyPr/>
+            <a:lstStyle/>
+            <a:p/>
+          </p:txBody>
+        </p:sp>
+        <p:sp>
+          <p:nvSpPr>
+            <p:cNvPr id="10" name="pl10"/>
+            <p:cNvSpPr/>
+            <p:nvPr/>
+          </p:nvSpPr>
+          <p:spPr>
+            <a:xfrm>
+              <a:off x="1523491" y="1681489"/>
               <a:ext cx="0" cy="3920204"/>
             </a:xfrm>
             <a:custGeom>
@@ -2463,13 +2549,13 @@
         </p:sp>
         <p:sp>
           <p:nvSpPr>
-            <p:cNvPr id="9" name="pl9"/>
-            <p:cNvSpPr/>
-            <p:nvPr/>
-          </p:nvSpPr>
-          <p:spPr>
-            <a:xfrm>
-              <a:off x="2203459" y="1681489"/>
+            <p:cNvPr id="11" name="pl11"/>
+            <p:cNvSpPr/>
+            <p:nvPr/>
+          </p:nvSpPr>
+          <p:spPr>
+            <a:xfrm>
+              <a:off x="2040102" y="1681489"/>
               <a:ext cx="0" cy="3920204"/>
             </a:xfrm>
             <a:custGeom>
@@ -2506,13 +2592,13 @@
         </p:sp>
         <p:sp>
           <p:nvSpPr>
-            <p:cNvPr id="10" name="pl10"/>
-            <p:cNvSpPr/>
-            <p:nvPr/>
-          </p:nvSpPr>
-          <p:spPr>
-            <a:xfrm>
-              <a:off x="2838876" y="1681489"/>
+            <p:cNvPr id="12" name="pl12"/>
+            <p:cNvSpPr/>
+            <p:nvPr/>
+          </p:nvSpPr>
+          <p:spPr>
+            <a:xfrm>
+              <a:off x="2556713" y="1681489"/>
               <a:ext cx="0" cy="3920204"/>
             </a:xfrm>
             <a:custGeom>
@@ -2549,13 +2635,13 @@
         </p:sp>
         <p:sp>
           <p:nvSpPr>
-            <p:cNvPr id="11" name="pl11"/>
-            <p:cNvSpPr/>
-            <p:nvPr/>
-          </p:nvSpPr>
-          <p:spPr>
-            <a:xfrm>
-              <a:off x="3474292" y="1681489"/>
+            <p:cNvPr id="13" name="pl13"/>
+            <p:cNvSpPr/>
+            <p:nvPr/>
+          </p:nvSpPr>
+          <p:spPr>
+            <a:xfrm>
+              <a:off x="3073323" y="1681489"/>
               <a:ext cx="0" cy="3920204"/>
             </a:xfrm>
             <a:custGeom>
@@ -2592,13 +2678,13 @@
         </p:sp>
         <p:sp>
           <p:nvSpPr>
-            <p:cNvPr id="12" name="pl12"/>
-            <p:cNvSpPr/>
-            <p:nvPr/>
-          </p:nvSpPr>
-          <p:spPr>
-            <a:xfrm>
-              <a:off x="4109708" y="1681489"/>
+            <p:cNvPr id="14" name="pl14"/>
+            <p:cNvSpPr/>
+            <p:nvPr/>
+          </p:nvSpPr>
+          <p:spPr>
+            <a:xfrm>
+              <a:off x="3589934" y="1681489"/>
               <a:ext cx="0" cy="3920204"/>
             </a:xfrm>
             <a:custGeom>
@@ -2635,13 +2721,13 @@
         </p:sp>
         <p:sp>
           <p:nvSpPr>
-            <p:cNvPr id="13" name="pl13"/>
-            <p:cNvSpPr/>
-            <p:nvPr/>
-          </p:nvSpPr>
-          <p:spPr>
-            <a:xfrm>
-              <a:off x="4745125" y="1681489"/>
+            <p:cNvPr id="15" name="pl15"/>
+            <p:cNvSpPr/>
+            <p:nvPr/>
+          </p:nvSpPr>
+          <p:spPr>
+            <a:xfrm>
+              <a:off x="4106545" y="1681489"/>
               <a:ext cx="0" cy="3920204"/>
             </a:xfrm>
             <a:custGeom>
@@ -2678,13 +2764,13 @@
         </p:sp>
         <p:sp>
           <p:nvSpPr>
-            <p:cNvPr id="14" name="pl14"/>
-            <p:cNvSpPr/>
-            <p:nvPr/>
-          </p:nvSpPr>
-          <p:spPr>
-            <a:xfrm>
-              <a:off x="5380541" y="1681489"/>
+            <p:cNvPr id="16" name="pl16"/>
+            <p:cNvSpPr/>
+            <p:nvPr/>
+          </p:nvSpPr>
+          <p:spPr>
+            <a:xfrm>
+              <a:off x="4623156" y="1681489"/>
               <a:ext cx="0" cy="3920204"/>
             </a:xfrm>
             <a:custGeom>
@@ -2721,13 +2807,13 @@
         </p:sp>
         <p:sp>
           <p:nvSpPr>
-            <p:cNvPr id="15" name="pl15"/>
-            <p:cNvSpPr/>
-            <p:nvPr/>
-          </p:nvSpPr>
-          <p:spPr>
-            <a:xfrm>
-              <a:off x="6015957" y="1681489"/>
+            <p:cNvPr id="17" name="pl17"/>
+            <p:cNvSpPr/>
+            <p:nvPr/>
+          </p:nvSpPr>
+          <p:spPr>
+            <a:xfrm>
+              <a:off x="5139767" y="1681489"/>
               <a:ext cx="0" cy="3920204"/>
             </a:xfrm>
             <a:custGeom>
@@ -2764,66 +2850,66 @@
         </p:sp>
         <p:sp>
           <p:nvSpPr>
-            <p:cNvPr id="16" name="pl16"/>
-            <p:cNvSpPr/>
-            <p:nvPr/>
-          </p:nvSpPr>
-          <p:spPr>
-            <a:xfrm>
-              <a:off x="1568043" y="3969431"/>
-              <a:ext cx="4765622" cy="1324018"/>
+            <p:cNvPr id="18" name="pl18"/>
+            <p:cNvSpPr/>
+            <p:nvPr/>
+          </p:nvSpPr>
+          <p:spPr>
+            <a:xfrm>
+              <a:off x="1523491" y="4456978"/>
+              <a:ext cx="3874581" cy="877520"/>
             </a:xfrm>
             <a:custGeom>
               <a:avLst/>
               <a:pathLst>
-                <a:path w="4765622" h="1324018">
+                <a:path w="3874581" h="877520">
                   <a:moveTo>
-                    <a:pt x="0" y="936175"/>
+                    <a:pt x="0" y="620469"/>
                   </a:moveTo>
                   <a:lnTo>
-                    <a:pt x="317708" y="1070716"/>
-                  </a:lnTo>
-                  <a:lnTo>
-                    <a:pt x="635416" y="736203"/>
-                  </a:lnTo>
-                  <a:lnTo>
-                    <a:pt x="953124" y="1324018"/>
-                  </a:lnTo>
-                  <a:lnTo>
-                    <a:pt x="1270832" y="1295139"/>
-                  </a:lnTo>
-                  <a:lnTo>
-                    <a:pt x="1588540" y="1034851"/>
-                  </a:lnTo>
-                  <a:lnTo>
-                    <a:pt x="1906248" y="691169"/>
-                  </a:lnTo>
-                  <a:lnTo>
-                    <a:pt x="2223957" y="681688"/>
-                  </a:lnTo>
-                  <a:lnTo>
-                    <a:pt x="2541665" y="1121426"/>
-                  </a:lnTo>
-                  <a:lnTo>
-                    <a:pt x="2859373" y="716243"/>
-                  </a:lnTo>
-                  <a:lnTo>
-                    <a:pt x="3177081" y="791467"/>
-                  </a:lnTo>
-                  <a:lnTo>
-                    <a:pt x="3494789" y="597919"/>
-                  </a:lnTo>
-                  <a:lnTo>
-                    <a:pt x="3812497" y="518953"/>
-                  </a:lnTo>
-                  <a:lnTo>
-                    <a:pt x="4130206" y="0"/>
-                  </a:lnTo>
-                  <a:lnTo>
-                    <a:pt x="4447914" y="925945"/>
-                  </a:lnTo>
-                  <a:lnTo>
-                    <a:pt x="4765622" y="572720"/>
+                    <a:pt x="258305" y="709639"/>
+                  </a:lnTo>
+                  <a:lnTo>
+                    <a:pt x="516610" y="487933"/>
+                  </a:lnTo>
+                  <a:lnTo>
+                    <a:pt x="774916" y="877520"/>
+                  </a:lnTo>
+                  <a:lnTo>
+                    <a:pt x="1033221" y="858379"/>
+                  </a:lnTo>
+                  <a:lnTo>
+                    <a:pt x="1291527" y="685868"/>
+                  </a:lnTo>
+                  <a:lnTo>
+                    <a:pt x="1549832" y="458086"/>
+                  </a:lnTo>
+                  <a:lnTo>
+                    <a:pt x="1808137" y="451802"/>
+                  </a:lnTo>
+                  <a:lnTo>
+                    <a:pt x="2066443" y="743248"/>
+                  </a:lnTo>
+                  <a:lnTo>
+                    <a:pt x="2324748" y="474704"/>
+                  </a:lnTo>
+                  <a:lnTo>
+                    <a:pt x="2583054" y="524560"/>
+                  </a:lnTo>
+                  <a:lnTo>
+                    <a:pt x="2841359" y="396283"/>
+                  </a:lnTo>
+                  <a:lnTo>
+                    <a:pt x="3099664" y="343947"/>
+                  </a:lnTo>
+                  <a:lnTo>
+                    <a:pt x="3357970" y="0"/>
+                  </a:lnTo>
+                  <a:lnTo>
+                    <a:pt x="3616275" y="613689"/>
+                  </a:lnTo>
+                  <a:lnTo>
+                    <a:pt x="3874581" y="379582"/>
                   </a:lnTo>
                 </a:path>
               </a:pathLst>
@@ -2846,66 +2932,66 @@
         </p:sp>
         <p:sp>
           <p:nvSpPr>
-            <p:cNvPr id="17" name="pl17"/>
-            <p:cNvSpPr/>
-            <p:nvPr/>
-          </p:nvSpPr>
-          <p:spPr>
-            <a:xfrm>
-              <a:off x="1568043" y="3424774"/>
-              <a:ext cx="4765622" cy="1998728"/>
+            <p:cNvPr id="19" name="pl19"/>
+            <p:cNvSpPr/>
+            <p:nvPr/>
+          </p:nvSpPr>
+          <p:spPr>
+            <a:xfrm>
+              <a:off x="1523491" y="4095995"/>
+              <a:ext cx="3874581" cy="1324697"/>
             </a:xfrm>
             <a:custGeom>
               <a:avLst/>
               <a:pathLst>
-                <a:path w="4765622" h="1998728">
+                <a:path w="3874581" h="1324697">
                   <a:moveTo>
-                    <a:pt x="0" y="1795637"/>
+                    <a:pt x="0" y="1190095"/>
                   </a:moveTo>
                   <a:lnTo>
-                    <a:pt x="317708" y="1606420"/>
-                  </a:lnTo>
-                  <a:lnTo>
-                    <a:pt x="635416" y="1635901"/>
-                  </a:lnTo>
-                  <a:lnTo>
-                    <a:pt x="953124" y="1595630"/>
-                  </a:lnTo>
-                  <a:lnTo>
-                    <a:pt x="1270832" y="1947666"/>
-                  </a:lnTo>
-                  <a:lnTo>
-                    <a:pt x="1588540" y="1832633"/>
-                  </a:lnTo>
-                  <a:lnTo>
-                    <a:pt x="1906248" y="1515087"/>
-                  </a:lnTo>
-                  <a:lnTo>
-                    <a:pt x="2223957" y="1614898"/>
-                  </a:lnTo>
-                  <a:lnTo>
-                    <a:pt x="2541665" y="1073259"/>
-                  </a:lnTo>
-                  <a:lnTo>
-                    <a:pt x="2859373" y="1411037"/>
-                  </a:lnTo>
-                  <a:lnTo>
-                    <a:pt x="3177081" y="686539"/>
-                  </a:lnTo>
-                  <a:lnTo>
-                    <a:pt x="3494789" y="0"/>
-                  </a:lnTo>
-                  <a:lnTo>
-                    <a:pt x="3812497" y="1659023"/>
-                  </a:lnTo>
-                  <a:lnTo>
-                    <a:pt x="4130206" y="1998728"/>
-                  </a:lnTo>
-                  <a:lnTo>
-                    <a:pt x="4447914" y="1889668"/>
-                  </a:lnTo>
-                  <a:lnTo>
-                    <a:pt x="4765622" y="1795252"/>
+                    <a:pt x="258305" y="1064687"/>
+                  </a:lnTo>
+                  <a:lnTo>
+                    <a:pt x="516610" y="1084226"/>
+                  </a:lnTo>
+                  <a:lnTo>
+                    <a:pt x="774916" y="1057536"/>
+                  </a:lnTo>
+                  <a:lnTo>
+                    <a:pt x="1033221" y="1290855"/>
+                  </a:lnTo>
+                  <a:lnTo>
+                    <a:pt x="1291527" y="1214614"/>
+                  </a:lnTo>
+                  <a:lnTo>
+                    <a:pt x="1549832" y="1004154"/>
+                  </a:lnTo>
+                  <a:lnTo>
+                    <a:pt x="1808137" y="1070306"/>
+                  </a:lnTo>
+                  <a:lnTo>
+                    <a:pt x="2066443" y="711324"/>
+                  </a:lnTo>
+                  <a:lnTo>
+                    <a:pt x="2324748" y="935193"/>
+                  </a:lnTo>
+                  <a:lnTo>
+                    <a:pt x="2583054" y="455017"/>
+                  </a:lnTo>
+                  <a:lnTo>
+                    <a:pt x="2841359" y="0"/>
+                  </a:lnTo>
+                  <a:lnTo>
+                    <a:pt x="3099664" y="1099551"/>
+                  </a:lnTo>
+                  <a:lnTo>
+                    <a:pt x="3357970" y="1324697"/>
+                  </a:lnTo>
+                  <a:lnTo>
+                    <a:pt x="3616275" y="1252416"/>
+                  </a:lnTo>
+                  <a:lnTo>
+                    <a:pt x="3874581" y="1189839"/>
                   </a:lnTo>
                 </a:path>
               </a:pathLst>
@@ -2928,66 +3014,66 @@
         </p:sp>
         <p:sp>
           <p:nvSpPr>
-            <p:cNvPr id="18" name="pl18"/>
-            <p:cNvSpPr/>
-            <p:nvPr/>
-          </p:nvSpPr>
-          <p:spPr>
-            <a:xfrm>
-              <a:off x="1568043" y="1859680"/>
-              <a:ext cx="4765622" cy="3562598"/>
+            <p:cNvPr id="20" name="pl20"/>
+            <p:cNvSpPr/>
+            <p:nvPr/>
+          </p:nvSpPr>
+          <p:spPr>
+            <a:xfrm>
+              <a:off x="1523491" y="3058698"/>
+              <a:ext cx="3874581" cy="2361184"/>
             </a:xfrm>
             <a:custGeom>
               <a:avLst/>
               <a:pathLst>
-                <a:path w="4765622" h="3562598">
+                <a:path w="3874581" h="2361184">
                   <a:moveTo>
-                    <a:pt x="0" y="2091597"/>
+                    <a:pt x="0" y="1386248"/>
                   </a:moveTo>
                   <a:lnTo>
-                    <a:pt x="317708" y="2731859"/>
-                  </a:lnTo>
-                  <a:lnTo>
-                    <a:pt x="635416" y="3286899"/>
-                  </a:lnTo>
-                  <a:lnTo>
-                    <a:pt x="953124" y="3425659"/>
-                  </a:lnTo>
-                  <a:lnTo>
-                    <a:pt x="1270832" y="3256307"/>
-                  </a:lnTo>
-                  <a:lnTo>
-                    <a:pt x="1588540" y="2714742"/>
-                  </a:lnTo>
-                  <a:lnTo>
-                    <a:pt x="1906248" y="3092417"/>
-                  </a:lnTo>
-                  <a:lnTo>
-                    <a:pt x="2223957" y="2564328"/>
-                  </a:lnTo>
-                  <a:lnTo>
-                    <a:pt x="2541665" y="2541383"/>
-                  </a:lnTo>
-                  <a:lnTo>
-                    <a:pt x="2859373" y="3193300"/>
-                  </a:lnTo>
-                  <a:lnTo>
-                    <a:pt x="3177081" y="3562598"/>
-                  </a:lnTo>
-                  <a:lnTo>
-                    <a:pt x="3494789" y="3092417"/>
-                  </a:lnTo>
-                  <a:lnTo>
-                    <a:pt x="3812497" y="2942731"/>
-                  </a:lnTo>
-                  <a:lnTo>
-                    <a:pt x="4130206" y="3092417"/>
-                  </a:lnTo>
-                  <a:lnTo>
-                    <a:pt x="4447914" y="1919695"/>
-                  </a:lnTo>
-                  <a:lnTo>
-                    <a:pt x="4765622" y="0"/>
+                    <a:pt x="258305" y="1810595"/>
+                  </a:lnTo>
+                  <a:lnTo>
+                    <a:pt x="516610" y="2178459"/>
+                  </a:lnTo>
+                  <a:lnTo>
+                    <a:pt x="774916" y="2270425"/>
+                  </a:lnTo>
+                  <a:lnTo>
+                    <a:pt x="1033221" y="2158183"/>
+                  </a:lnTo>
+                  <a:lnTo>
+                    <a:pt x="1291527" y="1799250"/>
+                  </a:lnTo>
+                  <a:lnTo>
+                    <a:pt x="1549832" y="2049562"/>
+                  </a:lnTo>
+                  <a:lnTo>
+                    <a:pt x="1808137" y="1699560"/>
+                  </a:lnTo>
+                  <a:lnTo>
+                    <a:pt x="2066443" y="1684353"/>
+                  </a:lnTo>
+                  <a:lnTo>
+                    <a:pt x="2324748" y="2116424"/>
+                  </a:lnTo>
+                  <a:lnTo>
+                    <a:pt x="2583054" y="2361184"/>
+                  </a:lnTo>
+                  <a:lnTo>
+                    <a:pt x="2841359" y="2049562"/>
+                  </a:lnTo>
+                  <a:lnTo>
+                    <a:pt x="3099664" y="1950354"/>
+                  </a:lnTo>
+                  <a:lnTo>
+                    <a:pt x="3357970" y="2049562"/>
+                  </a:lnTo>
+                  <a:lnTo>
+                    <a:pt x="3616275" y="1272316"/>
+                  </a:lnTo>
+                  <a:lnTo>
+                    <a:pt x="3874581" y="0"/>
                   </a:lnTo>
                 </a:path>
               </a:pathLst>
@@ -3010,72 +3096,236 @@
         </p:sp>
         <p:sp>
           <p:nvSpPr>
-            <p:cNvPr id="19" name="pl19"/>
-            <p:cNvSpPr/>
-            <p:nvPr/>
-          </p:nvSpPr>
-          <p:spPr>
-            <a:xfrm>
-              <a:off x="1568043" y="4080863"/>
-              <a:ext cx="4765622" cy="1279775"/>
+            <p:cNvPr id="21" name="pl21"/>
+            <p:cNvSpPr/>
+            <p:nvPr/>
+          </p:nvSpPr>
+          <p:spPr>
+            <a:xfrm>
+              <a:off x="1523491" y="1859680"/>
+              <a:ext cx="3874581" cy="3563822"/>
             </a:xfrm>
             <a:custGeom>
               <a:avLst/>
               <a:pathLst>
-                <a:path w="4765622" h="1279775">
+                <a:path w="3874581" h="3563822">
                   <a:moveTo>
-                    <a:pt x="0" y="685001"/>
+                    <a:pt x="0" y="3563822"/>
                   </a:moveTo>
                   <a:lnTo>
-                    <a:pt x="317708" y="0"/>
-                  </a:lnTo>
-                  <a:lnTo>
-                    <a:pt x="635416" y="645015"/>
-                  </a:lnTo>
-                  <a:lnTo>
-                    <a:pt x="953124" y="1222927"/>
-                  </a:lnTo>
-                  <a:lnTo>
-                    <a:pt x="1270832" y="1279775"/>
-                  </a:lnTo>
-                  <a:lnTo>
-                    <a:pt x="1588540" y="1158714"/>
-                  </a:lnTo>
-                  <a:lnTo>
-                    <a:pt x="1906248" y="842745"/>
-                  </a:lnTo>
-                  <a:lnTo>
-                    <a:pt x="2223957" y="807025"/>
-                  </a:lnTo>
-                  <a:lnTo>
-                    <a:pt x="2541665" y="931459"/>
-                  </a:lnTo>
-                  <a:lnTo>
-                    <a:pt x="2859373" y="770136"/>
-                  </a:lnTo>
-                  <a:lnTo>
-                    <a:pt x="3177081" y="860501"/>
-                  </a:lnTo>
-                  <a:lnTo>
-                    <a:pt x="3494789" y="395529"/>
-                  </a:lnTo>
-                  <a:lnTo>
-                    <a:pt x="3812497" y="358571"/>
-                  </a:lnTo>
-                  <a:lnTo>
-                    <a:pt x="4130206" y="422714"/>
-                  </a:lnTo>
-                  <a:lnTo>
-                    <a:pt x="4447914" y="1186312"/>
-                  </a:lnTo>
-                  <a:lnTo>
-                    <a:pt x="4765622" y="673576"/>
+                    <a:pt x="258305" y="3486231"/>
+                  </a:lnTo>
+                  <a:lnTo>
+                    <a:pt x="516610" y="3482390"/>
+                  </a:lnTo>
+                  <a:lnTo>
+                    <a:pt x="774916" y="3445515"/>
+                  </a:lnTo>
+                  <a:lnTo>
+                    <a:pt x="1033221" y="3324902"/>
+                  </a:lnTo>
+                  <a:lnTo>
+                    <a:pt x="1291527" y="3555372"/>
+                  </a:lnTo>
+                  <a:lnTo>
+                    <a:pt x="1549832" y="3503900"/>
+                  </a:lnTo>
+                  <a:lnTo>
+                    <a:pt x="1808137" y="3563822"/>
+                  </a:lnTo>
+                  <a:lnTo>
+                    <a:pt x="2066443" y="3563822"/>
+                  </a:lnTo>
+                  <a:lnTo>
+                    <a:pt x="2324748" y="3563822"/>
+                  </a:lnTo>
+                  <a:lnTo>
+                    <a:pt x="2583054" y="3498523"/>
+                  </a:lnTo>
+                  <a:lnTo>
+                    <a:pt x="2841359" y="3123626"/>
+                  </a:lnTo>
+                  <a:lnTo>
+                    <a:pt x="3099664" y="341862"/>
+                  </a:lnTo>
+                  <a:lnTo>
+                    <a:pt x="3357970" y="0"/>
+                  </a:lnTo>
+                  <a:lnTo>
+                    <a:pt x="3616275" y="2161801"/>
+                  </a:lnTo>
+                  <a:lnTo>
+                    <a:pt x="3874581" y="2315447"/>
                   </a:lnTo>
                 </a:path>
               </a:pathLst>
             </a:custGeom>
             <a:ln w="35231" cap="flat">
               <a:solidFill>
+                <a:srgbClr val="E7298A">
+                  <a:alpha val="100000"/>
+                </a:srgbClr>
+              </a:solidFill>
+              <a:prstDash val="solid"/>
+              <a:round/>
+            </a:ln>
+          </p:spPr>
+          <p:txBody>
+            <a:bodyPr/>
+            <a:lstStyle/>
+            <a:p/>
+          </p:txBody>
+        </p:sp>
+        <p:sp>
+          <p:nvSpPr>
+            <p:cNvPr id="22" name="pl22"/>
+            <p:cNvSpPr/>
+            <p:nvPr/>
+          </p:nvSpPr>
+          <p:spPr>
+            <a:xfrm>
+              <a:off x="1523491" y="3203665"/>
+              <a:ext cx="3874581" cy="2219837"/>
+            </a:xfrm>
+            <a:custGeom>
+              <a:avLst/>
+              <a:pathLst>
+                <a:path w="3874581" h="2219837">
+                  <a:moveTo>
+                    <a:pt x="0" y="2219837"/>
+                  </a:moveTo>
+                  <a:lnTo>
+                    <a:pt x="258305" y="2207573"/>
+                  </a:lnTo>
+                  <a:lnTo>
+                    <a:pt x="516610" y="2219837"/>
+                  </a:lnTo>
+                  <a:lnTo>
+                    <a:pt x="774916" y="2219837"/>
+                  </a:lnTo>
+                  <a:lnTo>
+                    <a:pt x="1033221" y="2219837"/>
+                  </a:lnTo>
+                  <a:lnTo>
+                    <a:pt x="1291527" y="2219837"/>
+                  </a:lnTo>
+                  <a:lnTo>
+                    <a:pt x="1549832" y="2219837"/>
+                  </a:lnTo>
+                  <a:lnTo>
+                    <a:pt x="1808137" y="2178138"/>
+                  </a:lnTo>
+                  <a:lnTo>
+                    <a:pt x="2066443" y="2190403"/>
+                  </a:lnTo>
+                  <a:lnTo>
+                    <a:pt x="2324748" y="2219837"/>
+                  </a:lnTo>
+                  <a:lnTo>
+                    <a:pt x="2583054" y="2219837"/>
+                  </a:lnTo>
+                  <a:lnTo>
+                    <a:pt x="2841359" y="1709642"/>
+                  </a:lnTo>
+                  <a:lnTo>
+                    <a:pt x="3099664" y="2160968"/>
+                  </a:lnTo>
+                  <a:lnTo>
+                    <a:pt x="3357970" y="0"/>
+                  </a:lnTo>
+                  <a:lnTo>
+                    <a:pt x="3616275" y="2219837"/>
+                  </a:lnTo>
+                  <a:lnTo>
+                    <a:pt x="3874581" y="1444734"/>
+                  </a:lnTo>
+                </a:path>
+              </a:pathLst>
+            </a:custGeom>
+            <a:ln w="35231" cap="flat">
+              <a:solidFill>
+                <a:srgbClr val="F0C419">
+                  <a:alpha val="100000"/>
+                </a:srgbClr>
+              </a:solidFill>
+              <a:prstDash val="solid"/>
+              <a:round/>
+            </a:ln>
+          </p:spPr>
+          <p:txBody>
+            <a:bodyPr/>
+            <a:lstStyle/>
+            <a:p/>
+          </p:txBody>
+        </p:sp>
+        <p:sp>
+          <p:nvSpPr>
+            <p:cNvPr id="23" name="pl23"/>
+            <p:cNvSpPr/>
+            <p:nvPr/>
+          </p:nvSpPr>
+          <p:spPr>
+            <a:xfrm>
+              <a:off x="1523491" y="4530832"/>
+              <a:ext cx="3874581" cy="848197"/>
+            </a:xfrm>
+            <a:custGeom>
+              <a:avLst/>
+              <a:pathLst>
+                <a:path w="3874581" h="848197">
+                  <a:moveTo>
+                    <a:pt x="0" y="453998"/>
+                  </a:moveTo>
+                  <a:lnTo>
+                    <a:pt x="258305" y="0"/>
+                  </a:lnTo>
+                  <a:lnTo>
+                    <a:pt x="516610" y="427496"/>
+                  </a:lnTo>
+                  <a:lnTo>
+                    <a:pt x="774916" y="810519"/>
+                  </a:lnTo>
+                  <a:lnTo>
+                    <a:pt x="1033221" y="848197"/>
+                  </a:lnTo>
+                  <a:lnTo>
+                    <a:pt x="1291527" y="767961"/>
+                  </a:lnTo>
+                  <a:lnTo>
+                    <a:pt x="1549832" y="558546"/>
+                  </a:lnTo>
+                  <a:lnTo>
+                    <a:pt x="1808137" y="534872"/>
+                  </a:lnTo>
+                  <a:lnTo>
+                    <a:pt x="2066443" y="617343"/>
+                  </a:lnTo>
+                  <a:lnTo>
+                    <a:pt x="2324748" y="510423"/>
+                  </a:lnTo>
+                  <a:lnTo>
+                    <a:pt x="2583054" y="570315"/>
+                  </a:lnTo>
+                  <a:lnTo>
+                    <a:pt x="2841359" y="262145"/>
+                  </a:lnTo>
+                  <a:lnTo>
+                    <a:pt x="3099664" y="237650"/>
+                  </a:lnTo>
+                  <a:lnTo>
+                    <a:pt x="3357970" y="280162"/>
+                  </a:lnTo>
+                  <a:lnTo>
+                    <a:pt x="3616275" y="786252"/>
+                  </a:lnTo>
+                  <a:lnTo>
+                    <a:pt x="3874581" y="446426"/>
+                  </a:lnTo>
+                </a:path>
+              </a:pathLst>
+            </a:custGeom>
+            <a:ln w="35231" cap="flat">
+              <a:solidFill>
                 <a:srgbClr val="D2B48C">
                   <a:alpha val="100000"/>
                 </a:srgbClr>
@@ -3092,13 +3342,13 @@
         </p:sp>
         <p:sp>
           <p:nvSpPr>
-            <p:cNvPr id="20" name="pt20"/>
-            <p:cNvSpPr/>
-            <p:nvPr/>
-          </p:nvSpPr>
-          <p:spPr>
-            <a:xfrm>
-              <a:off x="1530868" y="5183237"/>
+            <p:cNvPr id="24" name="pt24"/>
+            <p:cNvSpPr/>
+            <p:nvPr/>
+          </p:nvSpPr>
+          <p:spPr>
+            <a:xfrm>
+              <a:off x="1486316" y="5248916"/>
               <a:ext cx="74350" cy="74350"/>
             </a:xfrm>
             <a:prstGeom prst="ellipse">
@@ -3127,13 +3377,13 @@
         </p:sp>
         <p:sp>
           <p:nvSpPr>
-            <p:cNvPr id="21" name="pt21"/>
-            <p:cNvSpPr/>
-            <p:nvPr/>
-          </p:nvSpPr>
-          <p:spPr>
-            <a:xfrm>
-              <a:off x="1848576" y="4994020"/>
+            <p:cNvPr id="25" name="pt25"/>
+            <p:cNvSpPr/>
+            <p:nvPr/>
+          </p:nvSpPr>
+          <p:spPr>
+            <a:xfrm>
+              <a:off x="1744621" y="5123508"/>
               <a:ext cx="74350" cy="74350"/>
             </a:xfrm>
             <a:prstGeom prst="ellipse">
@@ -3162,13 +3412,13 @@
         </p:sp>
         <p:sp>
           <p:nvSpPr>
-            <p:cNvPr id="22" name="pt22"/>
-            <p:cNvSpPr/>
-            <p:nvPr/>
-          </p:nvSpPr>
-          <p:spPr>
-            <a:xfrm>
-              <a:off x="2166284" y="5023500"/>
+            <p:cNvPr id="26" name="pt26"/>
+            <p:cNvSpPr/>
+            <p:nvPr/>
+          </p:nvSpPr>
+          <p:spPr>
+            <a:xfrm>
+              <a:off x="2002927" y="5143047"/>
               <a:ext cx="74350" cy="74350"/>
             </a:xfrm>
             <a:prstGeom prst="ellipse">
@@ -3197,13 +3447,13 @@
         </p:sp>
         <p:sp>
           <p:nvSpPr>
-            <p:cNvPr id="23" name="pt23"/>
-            <p:cNvSpPr/>
-            <p:nvPr/>
-          </p:nvSpPr>
-          <p:spPr>
-            <a:xfrm>
-              <a:off x="2483993" y="4983229"/>
+            <p:cNvPr id="27" name="pt27"/>
+            <p:cNvSpPr/>
+            <p:nvPr/>
+          </p:nvSpPr>
+          <p:spPr>
+            <a:xfrm>
+              <a:off x="2261232" y="5116356"/>
               <a:ext cx="74350" cy="74350"/>
             </a:xfrm>
             <a:prstGeom prst="ellipse">
@@ -3232,13 +3482,13 @@
         </p:sp>
         <p:sp>
           <p:nvSpPr>
-            <p:cNvPr id="24" name="pt24"/>
-            <p:cNvSpPr/>
-            <p:nvPr/>
-          </p:nvSpPr>
-          <p:spPr>
-            <a:xfrm>
-              <a:off x="2801701" y="5335266"/>
+            <p:cNvPr id="28" name="pt28"/>
+            <p:cNvSpPr/>
+            <p:nvPr/>
+          </p:nvSpPr>
+          <p:spPr>
+            <a:xfrm>
+              <a:off x="2519538" y="5349676"/>
               <a:ext cx="74350" cy="74350"/>
             </a:xfrm>
             <a:prstGeom prst="ellipse">
@@ -3267,13 +3517,13 @@
         </p:sp>
         <p:sp>
           <p:nvSpPr>
-            <p:cNvPr id="25" name="pt25"/>
-            <p:cNvSpPr/>
-            <p:nvPr/>
-          </p:nvSpPr>
-          <p:spPr>
-            <a:xfrm>
-              <a:off x="3119409" y="5220233"/>
+            <p:cNvPr id="29" name="pt29"/>
+            <p:cNvSpPr/>
+            <p:nvPr/>
+          </p:nvSpPr>
+          <p:spPr>
+            <a:xfrm>
+              <a:off x="2777843" y="5273435"/>
               <a:ext cx="74350" cy="74350"/>
             </a:xfrm>
             <a:prstGeom prst="ellipse">
@@ -3302,13 +3552,13 @@
         </p:sp>
         <p:sp>
           <p:nvSpPr>
-            <p:cNvPr id="26" name="pt26"/>
-            <p:cNvSpPr/>
-            <p:nvPr/>
-          </p:nvSpPr>
-          <p:spPr>
-            <a:xfrm>
-              <a:off x="3437117" y="4902686"/>
+            <p:cNvPr id="30" name="pt30"/>
+            <p:cNvSpPr/>
+            <p:nvPr/>
+          </p:nvSpPr>
+          <p:spPr>
+            <a:xfrm>
+              <a:off x="3036148" y="5062975"/>
               <a:ext cx="74350" cy="74350"/>
             </a:xfrm>
             <a:prstGeom prst="ellipse">
@@ -3337,13 +3587,13 @@
         </p:sp>
         <p:sp>
           <p:nvSpPr>
-            <p:cNvPr id="27" name="pt27"/>
-            <p:cNvSpPr/>
-            <p:nvPr/>
-          </p:nvSpPr>
-          <p:spPr>
-            <a:xfrm>
-              <a:off x="3754825" y="5002498"/>
+            <p:cNvPr id="31" name="pt31"/>
+            <p:cNvSpPr/>
+            <p:nvPr/>
+          </p:nvSpPr>
+          <p:spPr>
+            <a:xfrm>
+              <a:off x="3294454" y="5129127"/>
               <a:ext cx="74350" cy="74350"/>
             </a:xfrm>
             <a:prstGeom prst="ellipse">
@@ -3372,13 +3622,13 @@
         </p:sp>
         <p:sp>
           <p:nvSpPr>
-            <p:cNvPr id="28" name="pt28"/>
-            <p:cNvSpPr/>
-            <p:nvPr/>
-          </p:nvSpPr>
-          <p:spPr>
-            <a:xfrm>
-              <a:off x="4072533" y="4460858"/>
+            <p:cNvPr id="32" name="pt32"/>
+            <p:cNvSpPr/>
+            <p:nvPr/>
+          </p:nvSpPr>
+          <p:spPr>
+            <a:xfrm>
+              <a:off x="3552759" y="4770145"/>
               <a:ext cx="74350" cy="74350"/>
             </a:xfrm>
             <a:prstGeom prst="ellipse">
@@ -3407,13 +3657,13 @@
         </p:sp>
         <p:sp>
           <p:nvSpPr>
-            <p:cNvPr id="29" name="pt29"/>
-            <p:cNvSpPr/>
-            <p:nvPr/>
-          </p:nvSpPr>
-          <p:spPr>
-            <a:xfrm>
-              <a:off x="4390241" y="4798636"/>
+            <p:cNvPr id="33" name="pt33"/>
+            <p:cNvSpPr/>
+            <p:nvPr/>
+          </p:nvSpPr>
+          <p:spPr>
+            <a:xfrm>
+              <a:off x="3811065" y="4994014"/>
               <a:ext cx="74350" cy="74350"/>
             </a:xfrm>
             <a:prstGeom prst="ellipse">
@@ -3442,13 +3692,13 @@
         </p:sp>
         <p:sp>
           <p:nvSpPr>
-            <p:cNvPr id="30" name="pt30"/>
-            <p:cNvSpPr/>
-            <p:nvPr/>
-          </p:nvSpPr>
-          <p:spPr>
-            <a:xfrm>
-              <a:off x="4707950" y="4074138"/>
+            <p:cNvPr id="34" name="pt34"/>
+            <p:cNvSpPr/>
+            <p:nvPr/>
+          </p:nvSpPr>
+          <p:spPr>
+            <a:xfrm>
+              <a:off x="4069370" y="4513838"/>
               <a:ext cx="74350" cy="74350"/>
             </a:xfrm>
             <a:prstGeom prst="ellipse">
@@ -3477,13 +3727,13 @@
         </p:sp>
         <p:sp>
           <p:nvSpPr>
-            <p:cNvPr id="31" name="pt31"/>
-            <p:cNvSpPr/>
-            <p:nvPr/>
-          </p:nvSpPr>
-          <p:spPr>
-            <a:xfrm>
-              <a:off x="5025658" y="3387599"/>
+            <p:cNvPr id="35" name="pt35"/>
+            <p:cNvSpPr/>
+            <p:nvPr/>
+          </p:nvSpPr>
+          <p:spPr>
+            <a:xfrm>
+              <a:off x="4327675" y="4058820"/>
               <a:ext cx="74350" cy="74350"/>
             </a:xfrm>
             <a:prstGeom prst="ellipse">
@@ -3512,13 +3762,13 @@
         </p:sp>
         <p:sp>
           <p:nvSpPr>
-            <p:cNvPr id="32" name="pt32"/>
-            <p:cNvSpPr/>
-            <p:nvPr/>
-          </p:nvSpPr>
-          <p:spPr>
-            <a:xfrm>
-              <a:off x="5343366" y="5046623"/>
+            <p:cNvPr id="36" name="pt36"/>
+            <p:cNvSpPr/>
+            <p:nvPr/>
+          </p:nvSpPr>
+          <p:spPr>
+            <a:xfrm>
+              <a:off x="4585981" y="5158372"/>
               <a:ext cx="74350" cy="74350"/>
             </a:xfrm>
             <a:prstGeom prst="ellipse">
@@ -3547,13 +3797,13 @@
         </p:sp>
         <p:sp>
           <p:nvSpPr>
-            <p:cNvPr id="33" name="pt33"/>
-            <p:cNvSpPr/>
-            <p:nvPr/>
-          </p:nvSpPr>
-          <p:spPr>
-            <a:xfrm>
-              <a:off x="5661074" y="5386328"/>
+            <p:cNvPr id="37" name="pt37"/>
+            <p:cNvSpPr/>
+            <p:nvPr/>
+          </p:nvSpPr>
+          <p:spPr>
+            <a:xfrm>
+              <a:off x="4844286" y="5383518"/>
               <a:ext cx="74350" cy="74350"/>
             </a:xfrm>
             <a:prstGeom prst="ellipse">
@@ -3582,13 +3832,13 @@
         </p:sp>
         <p:sp>
           <p:nvSpPr>
-            <p:cNvPr id="34" name="pt34"/>
-            <p:cNvSpPr/>
-            <p:nvPr/>
-          </p:nvSpPr>
-          <p:spPr>
-            <a:xfrm>
-              <a:off x="5978782" y="5277267"/>
+            <p:cNvPr id="38" name="pt38"/>
+            <p:cNvSpPr/>
+            <p:nvPr/>
+          </p:nvSpPr>
+          <p:spPr>
+            <a:xfrm>
+              <a:off x="5102592" y="5311236"/>
               <a:ext cx="74350" cy="74350"/>
             </a:xfrm>
             <a:prstGeom prst="ellipse">
@@ -3617,13 +3867,13 @@
         </p:sp>
         <p:sp>
           <p:nvSpPr>
-            <p:cNvPr id="35" name="pt35"/>
-            <p:cNvSpPr/>
-            <p:nvPr/>
-          </p:nvSpPr>
-          <p:spPr>
-            <a:xfrm>
-              <a:off x="6296490" y="5182851"/>
+            <p:cNvPr id="39" name="pt39"/>
+            <p:cNvSpPr/>
+            <p:nvPr/>
+          </p:nvSpPr>
+          <p:spPr>
+            <a:xfrm>
+              <a:off x="5360897" y="5248660"/>
               <a:ext cx="74350" cy="74350"/>
             </a:xfrm>
             <a:prstGeom prst="ellipse">
@@ -3652,13 +3902,1133 @@
         </p:sp>
         <p:sp>
           <p:nvSpPr>
-            <p:cNvPr id="36" name="pt36"/>
-            <p:cNvSpPr/>
-            <p:nvPr/>
-          </p:nvSpPr>
-          <p:spPr>
-            <a:xfrm>
-              <a:off x="1530868" y="4728690"/>
+            <p:cNvPr id="40" name="pt40"/>
+            <p:cNvSpPr/>
+            <p:nvPr/>
+          </p:nvSpPr>
+          <p:spPr>
+            <a:xfrm>
+              <a:off x="1486316" y="5386328"/>
+              <a:ext cx="74350" cy="74350"/>
+            </a:xfrm>
+            <a:prstGeom prst="ellipse">
+              <a:avLst/>
+            </a:prstGeom>
+            <a:solidFill>
+              <a:srgbClr val="F0C419">
+                <a:alpha val="100000"/>
+              </a:srgbClr>
+            </a:solidFill>
+            <a:ln w="14727" cap="rnd">
+              <a:solidFill>
+                <a:srgbClr val="F0C419">
+                  <a:alpha val="100000"/>
+                </a:srgbClr>
+              </a:solidFill>
+              <a:prstDash val="solid"/>
+              <a:round/>
+            </a:ln>
+          </p:spPr>
+          <p:txBody>
+            <a:bodyPr/>
+            <a:lstStyle/>
+            <a:p/>
+          </p:txBody>
+        </p:sp>
+        <p:sp>
+          <p:nvSpPr>
+            <p:cNvPr id="41" name="pt41"/>
+            <p:cNvSpPr/>
+            <p:nvPr/>
+          </p:nvSpPr>
+          <p:spPr>
+            <a:xfrm>
+              <a:off x="1744621" y="5374063"/>
+              <a:ext cx="74350" cy="74350"/>
+            </a:xfrm>
+            <a:prstGeom prst="ellipse">
+              <a:avLst/>
+            </a:prstGeom>
+            <a:solidFill>
+              <a:srgbClr val="F0C419">
+                <a:alpha val="100000"/>
+              </a:srgbClr>
+            </a:solidFill>
+            <a:ln w="14727" cap="rnd">
+              <a:solidFill>
+                <a:srgbClr val="F0C419">
+                  <a:alpha val="100000"/>
+                </a:srgbClr>
+              </a:solidFill>
+              <a:prstDash val="solid"/>
+              <a:round/>
+            </a:ln>
+          </p:spPr>
+          <p:txBody>
+            <a:bodyPr/>
+            <a:lstStyle/>
+            <a:p/>
+          </p:txBody>
+        </p:sp>
+        <p:sp>
+          <p:nvSpPr>
+            <p:cNvPr id="42" name="pt42"/>
+            <p:cNvSpPr/>
+            <p:nvPr/>
+          </p:nvSpPr>
+          <p:spPr>
+            <a:xfrm>
+              <a:off x="2002927" y="5386328"/>
+              <a:ext cx="74350" cy="74350"/>
+            </a:xfrm>
+            <a:prstGeom prst="ellipse">
+              <a:avLst/>
+            </a:prstGeom>
+            <a:solidFill>
+              <a:srgbClr val="F0C419">
+                <a:alpha val="100000"/>
+              </a:srgbClr>
+            </a:solidFill>
+            <a:ln w="14727" cap="rnd">
+              <a:solidFill>
+                <a:srgbClr val="F0C419">
+                  <a:alpha val="100000"/>
+                </a:srgbClr>
+              </a:solidFill>
+              <a:prstDash val="solid"/>
+              <a:round/>
+            </a:ln>
+          </p:spPr>
+          <p:txBody>
+            <a:bodyPr/>
+            <a:lstStyle/>
+            <a:p/>
+          </p:txBody>
+        </p:sp>
+        <p:sp>
+          <p:nvSpPr>
+            <p:cNvPr id="43" name="pt43"/>
+            <p:cNvSpPr/>
+            <p:nvPr/>
+          </p:nvSpPr>
+          <p:spPr>
+            <a:xfrm>
+              <a:off x="2261232" y="5386328"/>
+              <a:ext cx="74350" cy="74350"/>
+            </a:xfrm>
+            <a:prstGeom prst="ellipse">
+              <a:avLst/>
+            </a:prstGeom>
+            <a:solidFill>
+              <a:srgbClr val="F0C419">
+                <a:alpha val="100000"/>
+              </a:srgbClr>
+            </a:solidFill>
+            <a:ln w="14727" cap="rnd">
+              <a:solidFill>
+                <a:srgbClr val="F0C419">
+                  <a:alpha val="100000"/>
+                </a:srgbClr>
+              </a:solidFill>
+              <a:prstDash val="solid"/>
+              <a:round/>
+            </a:ln>
+          </p:spPr>
+          <p:txBody>
+            <a:bodyPr/>
+            <a:lstStyle/>
+            <a:p/>
+          </p:txBody>
+        </p:sp>
+        <p:sp>
+          <p:nvSpPr>
+            <p:cNvPr id="44" name="pt44"/>
+            <p:cNvSpPr/>
+            <p:nvPr/>
+          </p:nvSpPr>
+          <p:spPr>
+            <a:xfrm>
+              <a:off x="2519538" y="5386328"/>
+              <a:ext cx="74350" cy="74350"/>
+            </a:xfrm>
+            <a:prstGeom prst="ellipse">
+              <a:avLst/>
+            </a:prstGeom>
+            <a:solidFill>
+              <a:srgbClr val="F0C419">
+                <a:alpha val="100000"/>
+              </a:srgbClr>
+            </a:solidFill>
+            <a:ln w="14727" cap="rnd">
+              <a:solidFill>
+                <a:srgbClr val="F0C419">
+                  <a:alpha val="100000"/>
+                </a:srgbClr>
+              </a:solidFill>
+              <a:prstDash val="solid"/>
+              <a:round/>
+            </a:ln>
+          </p:spPr>
+          <p:txBody>
+            <a:bodyPr/>
+            <a:lstStyle/>
+            <a:p/>
+          </p:txBody>
+        </p:sp>
+        <p:sp>
+          <p:nvSpPr>
+            <p:cNvPr id="45" name="pt45"/>
+            <p:cNvSpPr/>
+            <p:nvPr/>
+          </p:nvSpPr>
+          <p:spPr>
+            <a:xfrm>
+              <a:off x="2777843" y="5386328"/>
+              <a:ext cx="74350" cy="74350"/>
+            </a:xfrm>
+            <a:prstGeom prst="ellipse">
+              <a:avLst/>
+            </a:prstGeom>
+            <a:solidFill>
+              <a:srgbClr val="F0C419">
+                <a:alpha val="100000"/>
+              </a:srgbClr>
+            </a:solidFill>
+            <a:ln w="14727" cap="rnd">
+              <a:solidFill>
+                <a:srgbClr val="F0C419">
+                  <a:alpha val="100000"/>
+                </a:srgbClr>
+              </a:solidFill>
+              <a:prstDash val="solid"/>
+              <a:round/>
+            </a:ln>
+          </p:spPr>
+          <p:txBody>
+            <a:bodyPr/>
+            <a:lstStyle/>
+            <a:p/>
+          </p:txBody>
+        </p:sp>
+        <p:sp>
+          <p:nvSpPr>
+            <p:cNvPr id="46" name="pt46"/>
+            <p:cNvSpPr/>
+            <p:nvPr/>
+          </p:nvSpPr>
+          <p:spPr>
+            <a:xfrm>
+              <a:off x="3036148" y="5386328"/>
+              <a:ext cx="74350" cy="74350"/>
+            </a:xfrm>
+            <a:prstGeom prst="ellipse">
+              <a:avLst/>
+            </a:prstGeom>
+            <a:solidFill>
+              <a:srgbClr val="F0C419">
+                <a:alpha val="100000"/>
+              </a:srgbClr>
+            </a:solidFill>
+            <a:ln w="14727" cap="rnd">
+              <a:solidFill>
+                <a:srgbClr val="F0C419">
+                  <a:alpha val="100000"/>
+                </a:srgbClr>
+              </a:solidFill>
+              <a:prstDash val="solid"/>
+              <a:round/>
+            </a:ln>
+          </p:spPr>
+          <p:txBody>
+            <a:bodyPr/>
+            <a:lstStyle/>
+            <a:p/>
+          </p:txBody>
+        </p:sp>
+        <p:sp>
+          <p:nvSpPr>
+            <p:cNvPr id="47" name="pt47"/>
+            <p:cNvSpPr/>
+            <p:nvPr/>
+          </p:nvSpPr>
+          <p:spPr>
+            <a:xfrm>
+              <a:off x="3294454" y="5344629"/>
+              <a:ext cx="74350" cy="74350"/>
+            </a:xfrm>
+            <a:prstGeom prst="ellipse">
+              <a:avLst/>
+            </a:prstGeom>
+            <a:solidFill>
+              <a:srgbClr val="F0C419">
+                <a:alpha val="100000"/>
+              </a:srgbClr>
+            </a:solidFill>
+            <a:ln w="14727" cap="rnd">
+              <a:solidFill>
+                <a:srgbClr val="F0C419">
+                  <a:alpha val="100000"/>
+                </a:srgbClr>
+              </a:solidFill>
+              <a:prstDash val="solid"/>
+              <a:round/>
+            </a:ln>
+          </p:spPr>
+          <p:txBody>
+            <a:bodyPr/>
+            <a:lstStyle/>
+            <a:p/>
+          </p:txBody>
+        </p:sp>
+        <p:sp>
+          <p:nvSpPr>
+            <p:cNvPr id="48" name="pt48"/>
+            <p:cNvSpPr/>
+            <p:nvPr/>
+          </p:nvSpPr>
+          <p:spPr>
+            <a:xfrm>
+              <a:off x="3552759" y="5356893"/>
+              <a:ext cx="74350" cy="74350"/>
+            </a:xfrm>
+            <a:prstGeom prst="ellipse">
+              <a:avLst/>
+            </a:prstGeom>
+            <a:solidFill>
+              <a:srgbClr val="F0C419">
+                <a:alpha val="100000"/>
+              </a:srgbClr>
+            </a:solidFill>
+            <a:ln w="14727" cap="rnd">
+              <a:solidFill>
+                <a:srgbClr val="F0C419">
+                  <a:alpha val="100000"/>
+                </a:srgbClr>
+              </a:solidFill>
+              <a:prstDash val="solid"/>
+              <a:round/>
+            </a:ln>
+          </p:spPr>
+          <p:txBody>
+            <a:bodyPr/>
+            <a:lstStyle/>
+            <a:p/>
+          </p:txBody>
+        </p:sp>
+        <p:sp>
+          <p:nvSpPr>
+            <p:cNvPr id="49" name="pt49"/>
+            <p:cNvSpPr/>
+            <p:nvPr/>
+          </p:nvSpPr>
+          <p:spPr>
+            <a:xfrm>
+              <a:off x="3811065" y="5386328"/>
+              <a:ext cx="74350" cy="74350"/>
+            </a:xfrm>
+            <a:prstGeom prst="ellipse">
+              <a:avLst/>
+            </a:prstGeom>
+            <a:solidFill>
+              <a:srgbClr val="F0C419">
+                <a:alpha val="100000"/>
+              </a:srgbClr>
+            </a:solidFill>
+            <a:ln w="14727" cap="rnd">
+              <a:solidFill>
+                <a:srgbClr val="F0C419">
+                  <a:alpha val="100000"/>
+                </a:srgbClr>
+              </a:solidFill>
+              <a:prstDash val="solid"/>
+              <a:round/>
+            </a:ln>
+          </p:spPr>
+          <p:txBody>
+            <a:bodyPr/>
+            <a:lstStyle/>
+            <a:p/>
+          </p:txBody>
+        </p:sp>
+        <p:sp>
+          <p:nvSpPr>
+            <p:cNvPr id="50" name="pt50"/>
+            <p:cNvSpPr/>
+            <p:nvPr/>
+          </p:nvSpPr>
+          <p:spPr>
+            <a:xfrm>
+              <a:off x="4069370" y="5386328"/>
+              <a:ext cx="74350" cy="74350"/>
+            </a:xfrm>
+            <a:prstGeom prst="ellipse">
+              <a:avLst/>
+            </a:prstGeom>
+            <a:solidFill>
+              <a:srgbClr val="F0C419">
+                <a:alpha val="100000"/>
+              </a:srgbClr>
+            </a:solidFill>
+            <a:ln w="14727" cap="rnd">
+              <a:solidFill>
+                <a:srgbClr val="F0C419">
+                  <a:alpha val="100000"/>
+                </a:srgbClr>
+              </a:solidFill>
+              <a:prstDash val="solid"/>
+              <a:round/>
+            </a:ln>
+          </p:spPr>
+          <p:txBody>
+            <a:bodyPr/>
+            <a:lstStyle/>
+            <a:p/>
+          </p:txBody>
+        </p:sp>
+        <p:sp>
+          <p:nvSpPr>
+            <p:cNvPr id="51" name="pt51"/>
+            <p:cNvSpPr/>
+            <p:nvPr/>
+          </p:nvSpPr>
+          <p:spPr>
+            <a:xfrm>
+              <a:off x="4327675" y="4876133"/>
+              <a:ext cx="74350" cy="74350"/>
+            </a:xfrm>
+            <a:prstGeom prst="ellipse">
+              <a:avLst/>
+            </a:prstGeom>
+            <a:solidFill>
+              <a:srgbClr val="F0C419">
+                <a:alpha val="100000"/>
+              </a:srgbClr>
+            </a:solidFill>
+            <a:ln w="14727" cap="rnd">
+              <a:solidFill>
+                <a:srgbClr val="F0C419">
+                  <a:alpha val="100000"/>
+                </a:srgbClr>
+              </a:solidFill>
+              <a:prstDash val="solid"/>
+              <a:round/>
+            </a:ln>
+          </p:spPr>
+          <p:txBody>
+            <a:bodyPr/>
+            <a:lstStyle/>
+            <a:p/>
+          </p:txBody>
+        </p:sp>
+        <p:sp>
+          <p:nvSpPr>
+            <p:cNvPr id="52" name="pt52"/>
+            <p:cNvSpPr/>
+            <p:nvPr/>
+          </p:nvSpPr>
+          <p:spPr>
+            <a:xfrm>
+              <a:off x="4585981" y="5327459"/>
+              <a:ext cx="74350" cy="74350"/>
+            </a:xfrm>
+            <a:prstGeom prst="ellipse">
+              <a:avLst/>
+            </a:prstGeom>
+            <a:solidFill>
+              <a:srgbClr val="F0C419">
+                <a:alpha val="100000"/>
+              </a:srgbClr>
+            </a:solidFill>
+            <a:ln w="14727" cap="rnd">
+              <a:solidFill>
+                <a:srgbClr val="F0C419">
+                  <a:alpha val="100000"/>
+                </a:srgbClr>
+              </a:solidFill>
+              <a:prstDash val="solid"/>
+              <a:round/>
+            </a:ln>
+          </p:spPr>
+          <p:txBody>
+            <a:bodyPr/>
+            <a:lstStyle/>
+            <a:p/>
+          </p:txBody>
+        </p:sp>
+        <p:sp>
+          <p:nvSpPr>
+            <p:cNvPr id="53" name="pt53"/>
+            <p:cNvSpPr/>
+            <p:nvPr/>
+          </p:nvSpPr>
+          <p:spPr>
+            <a:xfrm>
+              <a:off x="4844286" y="3166490"/>
+              <a:ext cx="74350" cy="74350"/>
+            </a:xfrm>
+            <a:prstGeom prst="ellipse">
+              <a:avLst/>
+            </a:prstGeom>
+            <a:solidFill>
+              <a:srgbClr val="F0C419">
+                <a:alpha val="100000"/>
+              </a:srgbClr>
+            </a:solidFill>
+            <a:ln w="14727" cap="rnd">
+              <a:solidFill>
+                <a:srgbClr val="F0C419">
+                  <a:alpha val="100000"/>
+                </a:srgbClr>
+              </a:solidFill>
+              <a:prstDash val="solid"/>
+              <a:round/>
+            </a:ln>
+          </p:spPr>
+          <p:txBody>
+            <a:bodyPr/>
+            <a:lstStyle/>
+            <a:p/>
+          </p:txBody>
+        </p:sp>
+        <p:sp>
+          <p:nvSpPr>
+            <p:cNvPr id="54" name="pt54"/>
+            <p:cNvSpPr/>
+            <p:nvPr/>
+          </p:nvSpPr>
+          <p:spPr>
+            <a:xfrm>
+              <a:off x="5102592" y="5386328"/>
+              <a:ext cx="74350" cy="74350"/>
+            </a:xfrm>
+            <a:prstGeom prst="ellipse">
+              <a:avLst/>
+            </a:prstGeom>
+            <a:solidFill>
+              <a:srgbClr val="F0C419">
+                <a:alpha val="100000"/>
+              </a:srgbClr>
+            </a:solidFill>
+            <a:ln w="14727" cap="rnd">
+              <a:solidFill>
+                <a:srgbClr val="F0C419">
+                  <a:alpha val="100000"/>
+                </a:srgbClr>
+              </a:solidFill>
+              <a:prstDash val="solid"/>
+              <a:round/>
+            </a:ln>
+          </p:spPr>
+          <p:txBody>
+            <a:bodyPr/>
+            <a:lstStyle/>
+            <a:p/>
+          </p:txBody>
+        </p:sp>
+        <p:sp>
+          <p:nvSpPr>
+            <p:cNvPr id="55" name="pt55"/>
+            <p:cNvSpPr/>
+            <p:nvPr/>
+          </p:nvSpPr>
+          <p:spPr>
+            <a:xfrm>
+              <a:off x="5360897" y="4611224"/>
+              <a:ext cx="74350" cy="74350"/>
+            </a:xfrm>
+            <a:prstGeom prst="ellipse">
+              <a:avLst/>
+            </a:prstGeom>
+            <a:solidFill>
+              <a:srgbClr val="F0C419">
+                <a:alpha val="100000"/>
+              </a:srgbClr>
+            </a:solidFill>
+            <a:ln w="14727" cap="rnd">
+              <a:solidFill>
+                <a:srgbClr val="F0C419">
+                  <a:alpha val="100000"/>
+                </a:srgbClr>
+              </a:solidFill>
+              <a:prstDash val="solid"/>
+              <a:round/>
+            </a:ln>
+          </p:spPr>
+          <p:txBody>
+            <a:bodyPr/>
+            <a:lstStyle/>
+            <a:p/>
+          </p:txBody>
+        </p:sp>
+        <p:sp>
+          <p:nvSpPr>
+            <p:cNvPr id="56" name="pt56"/>
+            <p:cNvSpPr/>
+            <p:nvPr/>
+          </p:nvSpPr>
+          <p:spPr>
+            <a:xfrm>
+              <a:off x="1486316" y="5386328"/>
+              <a:ext cx="74350" cy="74350"/>
+            </a:xfrm>
+            <a:prstGeom prst="ellipse">
+              <a:avLst/>
+            </a:prstGeom>
+            <a:solidFill>
+              <a:srgbClr val="E7298A">
+                <a:alpha val="100000"/>
+              </a:srgbClr>
+            </a:solidFill>
+            <a:ln w="14727" cap="rnd">
+              <a:solidFill>
+                <a:srgbClr val="E7298A">
+                  <a:alpha val="100000"/>
+                </a:srgbClr>
+              </a:solidFill>
+              <a:prstDash val="solid"/>
+              <a:round/>
+            </a:ln>
+          </p:spPr>
+          <p:txBody>
+            <a:bodyPr/>
+            <a:lstStyle/>
+            <a:p/>
+          </p:txBody>
+        </p:sp>
+        <p:sp>
+          <p:nvSpPr>
+            <p:cNvPr id="57" name="pt57"/>
+            <p:cNvSpPr/>
+            <p:nvPr/>
+          </p:nvSpPr>
+          <p:spPr>
+            <a:xfrm>
+              <a:off x="1744621" y="5308736"/>
+              <a:ext cx="74350" cy="74350"/>
+            </a:xfrm>
+            <a:prstGeom prst="ellipse">
+              <a:avLst/>
+            </a:prstGeom>
+            <a:solidFill>
+              <a:srgbClr val="E7298A">
+                <a:alpha val="100000"/>
+              </a:srgbClr>
+            </a:solidFill>
+            <a:ln w="14727" cap="rnd">
+              <a:solidFill>
+                <a:srgbClr val="E7298A">
+                  <a:alpha val="100000"/>
+                </a:srgbClr>
+              </a:solidFill>
+              <a:prstDash val="solid"/>
+              <a:round/>
+            </a:ln>
+          </p:spPr>
+          <p:txBody>
+            <a:bodyPr/>
+            <a:lstStyle/>
+            <a:p/>
+          </p:txBody>
+        </p:sp>
+        <p:sp>
+          <p:nvSpPr>
+            <p:cNvPr id="58" name="pt58"/>
+            <p:cNvSpPr/>
+            <p:nvPr/>
+          </p:nvSpPr>
+          <p:spPr>
+            <a:xfrm>
+              <a:off x="2002927" y="5304895"/>
+              <a:ext cx="74350" cy="74350"/>
+            </a:xfrm>
+            <a:prstGeom prst="ellipse">
+              <a:avLst/>
+            </a:prstGeom>
+            <a:solidFill>
+              <a:srgbClr val="E7298A">
+                <a:alpha val="100000"/>
+              </a:srgbClr>
+            </a:solidFill>
+            <a:ln w="14727" cap="rnd">
+              <a:solidFill>
+                <a:srgbClr val="E7298A">
+                  <a:alpha val="100000"/>
+                </a:srgbClr>
+              </a:solidFill>
+              <a:prstDash val="solid"/>
+              <a:round/>
+            </a:ln>
+          </p:spPr>
+          <p:txBody>
+            <a:bodyPr/>
+            <a:lstStyle/>
+            <a:p/>
+          </p:txBody>
+        </p:sp>
+        <p:sp>
+          <p:nvSpPr>
+            <p:cNvPr id="59" name="pt59"/>
+            <p:cNvSpPr/>
+            <p:nvPr/>
+          </p:nvSpPr>
+          <p:spPr>
+            <a:xfrm>
+              <a:off x="2261232" y="5268020"/>
+              <a:ext cx="74350" cy="74350"/>
+            </a:xfrm>
+            <a:prstGeom prst="ellipse">
+              <a:avLst/>
+            </a:prstGeom>
+            <a:solidFill>
+              <a:srgbClr val="E7298A">
+                <a:alpha val="100000"/>
+              </a:srgbClr>
+            </a:solidFill>
+            <a:ln w="14727" cap="rnd">
+              <a:solidFill>
+                <a:srgbClr val="E7298A">
+                  <a:alpha val="100000"/>
+                </a:srgbClr>
+              </a:solidFill>
+              <a:prstDash val="solid"/>
+              <a:round/>
+            </a:ln>
+          </p:spPr>
+          <p:txBody>
+            <a:bodyPr/>
+            <a:lstStyle/>
+            <a:p/>
+          </p:txBody>
+        </p:sp>
+        <p:sp>
+          <p:nvSpPr>
+            <p:cNvPr id="60" name="pt60"/>
+            <p:cNvSpPr/>
+            <p:nvPr/>
+          </p:nvSpPr>
+          <p:spPr>
+            <a:xfrm>
+              <a:off x="2519538" y="5147408"/>
+              <a:ext cx="74350" cy="74350"/>
+            </a:xfrm>
+            <a:prstGeom prst="ellipse">
+              <a:avLst/>
+            </a:prstGeom>
+            <a:solidFill>
+              <a:srgbClr val="E7298A">
+                <a:alpha val="100000"/>
+              </a:srgbClr>
+            </a:solidFill>
+            <a:ln w="14727" cap="rnd">
+              <a:solidFill>
+                <a:srgbClr val="E7298A">
+                  <a:alpha val="100000"/>
+                </a:srgbClr>
+              </a:solidFill>
+              <a:prstDash val="solid"/>
+              <a:round/>
+            </a:ln>
+          </p:spPr>
+          <p:txBody>
+            <a:bodyPr/>
+            <a:lstStyle/>
+            <a:p/>
+          </p:txBody>
+        </p:sp>
+        <p:sp>
+          <p:nvSpPr>
+            <p:cNvPr id="61" name="pt61"/>
+            <p:cNvSpPr/>
+            <p:nvPr/>
+          </p:nvSpPr>
+          <p:spPr>
+            <a:xfrm>
+              <a:off x="2777843" y="5377877"/>
+              <a:ext cx="74350" cy="74350"/>
+            </a:xfrm>
+            <a:prstGeom prst="ellipse">
+              <a:avLst/>
+            </a:prstGeom>
+            <a:solidFill>
+              <a:srgbClr val="E7298A">
+                <a:alpha val="100000"/>
+              </a:srgbClr>
+            </a:solidFill>
+            <a:ln w="14727" cap="rnd">
+              <a:solidFill>
+                <a:srgbClr val="E7298A">
+                  <a:alpha val="100000"/>
+                </a:srgbClr>
+              </a:solidFill>
+              <a:prstDash val="solid"/>
+              <a:round/>
+            </a:ln>
+          </p:spPr>
+          <p:txBody>
+            <a:bodyPr/>
+            <a:lstStyle/>
+            <a:p/>
+          </p:txBody>
+        </p:sp>
+        <p:sp>
+          <p:nvSpPr>
+            <p:cNvPr id="62" name="pt62"/>
+            <p:cNvSpPr/>
+            <p:nvPr/>
+          </p:nvSpPr>
+          <p:spPr>
+            <a:xfrm>
+              <a:off x="3036148" y="5326406"/>
+              <a:ext cx="74350" cy="74350"/>
+            </a:xfrm>
+            <a:prstGeom prst="ellipse">
+              <a:avLst/>
+            </a:prstGeom>
+            <a:solidFill>
+              <a:srgbClr val="E7298A">
+                <a:alpha val="100000"/>
+              </a:srgbClr>
+            </a:solidFill>
+            <a:ln w="14727" cap="rnd">
+              <a:solidFill>
+                <a:srgbClr val="E7298A">
+                  <a:alpha val="100000"/>
+                </a:srgbClr>
+              </a:solidFill>
+              <a:prstDash val="solid"/>
+              <a:round/>
+            </a:ln>
+          </p:spPr>
+          <p:txBody>
+            <a:bodyPr/>
+            <a:lstStyle/>
+            <a:p/>
+          </p:txBody>
+        </p:sp>
+        <p:sp>
+          <p:nvSpPr>
+            <p:cNvPr id="63" name="pt63"/>
+            <p:cNvSpPr/>
+            <p:nvPr/>
+          </p:nvSpPr>
+          <p:spPr>
+            <a:xfrm>
+              <a:off x="3294454" y="5386328"/>
+              <a:ext cx="74350" cy="74350"/>
+            </a:xfrm>
+            <a:prstGeom prst="ellipse">
+              <a:avLst/>
+            </a:prstGeom>
+            <a:solidFill>
+              <a:srgbClr val="E7298A">
+                <a:alpha val="100000"/>
+              </a:srgbClr>
+            </a:solidFill>
+            <a:ln w="14727" cap="rnd">
+              <a:solidFill>
+                <a:srgbClr val="E7298A">
+                  <a:alpha val="100000"/>
+                </a:srgbClr>
+              </a:solidFill>
+              <a:prstDash val="solid"/>
+              <a:round/>
+            </a:ln>
+          </p:spPr>
+          <p:txBody>
+            <a:bodyPr/>
+            <a:lstStyle/>
+            <a:p/>
+          </p:txBody>
+        </p:sp>
+        <p:sp>
+          <p:nvSpPr>
+            <p:cNvPr id="64" name="pt64"/>
+            <p:cNvSpPr/>
+            <p:nvPr/>
+          </p:nvSpPr>
+          <p:spPr>
+            <a:xfrm>
+              <a:off x="3552759" y="5386328"/>
+              <a:ext cx="74350" cy="74350"/>
+            </a:xfrm>
+            <a:prstGeom prst="ellipse">
+              <a:avLst/>
+            </a:prstGeom>
+            <a:solidFill>
+              <a:srgbClr val="E7298A">
+                <a:alpha val="100000"/>
+              </a:srgbClr>
+            </a:solidFill>
+            <a:ln w="14727" cap="rnd">
+              <a:solidFill>
+                <a:srgbClr val="E7298A">
+                  <a:alpha val="100000"/>
+                </a:srgbClr>
+              </a:solidFill>
+              <a:prstDash val="solid"/>
+              <a:round/>
+            </a:ln>
+          </p:spPr>
+          <p:txBody>
+            <a:bodyPr/>
+            <a:lstStyle/>
+            <a:p/>
+          </p:txBody>
+        </p:sp>
+        <p:sp>
+          <p:nvSpPr>
+            <p:cNvPr id="65" name="pt65"/>
+            <p:cNvSpPr/>
+            <p:nvPr/>
+          </p:nvSpPr>
+          <p:spPr>
+            <a:xfrm>
+              <a:off x="3811065" y="5386328"/>
+              <a:ext cx="74350" cy="74350"/>
+            </a:xfrm>
+            <a:prstGeom prst="ellipse">
+              <a:avLst/>
+            </a:prstGeom>
+            <a:solidFill>
+              <a:srgbClr val="E7298A">
+                <a:alpha val="100000"/>
+              </a:srgbClr>
+            </a:solidFill>
+            <a:ln w="14727" cap="rnd">
+              <a:solidFill>
+                <a:srgbClr val="E7298A">
+                  <a:alpha val="100000"/>
+                </a:srgbClr>
+              </a:solidFill>
+              <a:prstDash val="solid"/>
+              <a:round/>
+            </a:ln>
+          </p:spPr>
+          <p:txBody>
+            <a:bodyPr/>
+            <a:lstStyle/>
+            <a:p/>
+          </p:txBody>
+        </p:sp>
+        <p:sp>
+          <p:nvSpPr>
+            <p:cNvPr id="66" name="pt66"/>
+            <p:cNvSpPr/>
+            <p:nvPr/>
+          </p:nvSpPr>
+          <p:spPr>
+            <a:xfrm>
+              <a:off x="4069370" y="5321028"/>
+              <a:ext cx="74350" cy="74350"/>
+            </a:xfrm>
+            <a:prstGeom prst="ellipse">
+              <a:avLst/>
+            </a:prstGeom>
+            <a:solidFill>
+              <a:srgbClr val="E7298A">
+                <a:alpha val="100000"/>
+              </a:srgbClr>
+            </a:solidFill>
+            <a:ln w="14727" cap="rnd">
+              <a:solidFill>
+                <a:srgbClr val="E7298A">
+                  <a:alpha val="100000"/>
+                </a:srgbClr>
+              </a:solidFill>
+              <a:prstDash val="solid"/>
+              <a:round/>
+            </a:ln>
+          </p:spPr>
+          <p:txBody>
+            <a:bodyPr/>
+            <a:lstStyle/>
+            <a:p/>
+          </p:txBody>
+        </p:sp>
+        <p:sp>
+          <p:nvSpPr>
+            <p:cNvPr id="67" name="pt67"/>
+            <p:cNvSpPr/>
+            <p:nvPr/>
+          </p:nvSpPr>
+          <p:spPr>
+            <a:xfrm>
+              <a:off x="4327675" y="4946131"/>
+              <a:ext cx="74350" cy="74350"/>
+            </a:xfrm>
+            <a:prstGeom prst="ellipse">
+              <a:avLst/>
+            </a:prstGeom>
+            <a:solidFill>
+              <a:srgbClr val="E7298A">
+                <a:alpha val="100000"/>
+              </a:srgbClr>
+            </a:solidFill>
+            <a:ln w="14727" cap="rnd">
+              <a:solidFill>
+                <a:srgbClr val="E7298A">
+                  <a:alpha val="100000"/>
+                </a:srgbClr>
+              </a:solidFill>
+              <a:prstDash val="solid"/>
+              <a:round/>
+            </a:ln>
+          </p:spPr>
+          <p:txBody>
+            <a:bodyPr/>
+            <a:lstStyle/>
+            <a:p/>
+          </p:txBody>
+        </p:sp>
+        <p:sp>
+          <p:nvSpPr>
+            <p:cNvPr id="68" name="pt68"/>
+            <p:cNvSpPr/>
+            <p:nvPr/>
+          </p:nvSpPr>
+          <p:spPr>
+            <a:xfrm>
+              <a:off x="4585981" y="2164368"/>
+              <a:ext cx="74350" cy="74350"/>
+            </a:xfrm>
+            <a:prstGeom prst="ellipse">
+              <a:avLst/>
+            </a:prstGeom>
+            <a:solidFill>
+              <a:srgbClr val="E7298A">
+                <a:alpha val="100000"/>
+              </a:srgbClr>
+            </a:solidFill>
+            <a:ln w="14727" cap="rnd">
+              <a:solidFill>
+                <a:srgbClr val="E7298A">
+                  <a:alpha val="100000"/>
+                </a:srgbClr>
+              </a:solidFill>
+              <a:prstDash val="solid"/>
+              <a:round/>
+            </a:ln>
+          </p:spPr>
+          <p:txBody>
+            <a:bodyPr/>
+            <a:lstStyle/>
+            <a:p/>
+          </p:txBody>
+        </p:sp>
+        <p:sp>
+          <p:nvSpPr>
+            <p:cNvPr id="69" name="pt69"/>
+            <p:cNvSpPr/>
+            <p:nvPr/>
+          </p:nvSpPr>
+          <p:spPr>
+            <a:xfrm>
+              <a:off x="4844286" y="1822505"/>
+              <a:ext cx="74350" cy="74350"/>
+            </a:xfrm>
+            <a:prstGeom prst="ellipse">
+              <a:avLst/>
+            </a:prstGeom>
+            <a:solidFill>
+              <a:srgbClr val="E7298A">
+                <a:alpha val="100000"/>
+              </a:srgbClr>
+            </a:solidFill>
+            <a:ln w="14727" cap="rnd">
+              <a:solidFill>
+                <a:srgbClr val="E7298A">
+                  <a:alpha val="100000"/>
+                </a:srgbClr>
+              </a:solidFill>
+              <a:prstDash val="solid"/>
+              <a:round/>
+            </a:ln>
+          </p:spPr>
+          <p:txBody>
+            <a:bodyPr/>
+            <a:lstStyle/>
+            <a:p/>
+          </p:txBody>
+        </p:sp>
+        <p:sp>
+          <p:nvSpPr>
+            <p:cNvPr id="70" name="pt70"/>
+            <p:cNvSpPr/>
+            <p:nvPr/>
+          </p:nvSpPr>
+          <p:spPr>
+            <a:xfrm>
+              <a:off x="5102592" y="3984306"/>
+              <a:ext cx="74350" cy="74350"/>
+            </a:xfrm>
+            <a:prstGeom prst="ellipse">
+              <a:avLst/>
+            </a:prstGeom>
+            <a:solidFill>
+              <a:srgbClr val="E7298A">
+                <a:alpha val="100000"/>
+              </a:srgbClr>
+            </a:solidFill>
+            <a:ln w="14727" cap="rnd">
+              <a:solidFill>
+                <a:srgbClr val="E7298A">
+                  <a:alpha val="100000"/>
+                </a:srgbClr>
+              </a:solidFill>
+              <a:prstDash val="solid"/>
+              <a:round/>
+            </a:ln>
+          </p:spPr>
+          <p:txBody>
+            <a:bodyPr/>
+            <a:lstStyle/>
+            <a:p/>
+          </p:txBody>
+        </p:sp>
+        <p:sp>
+          <p:nvSpPr>
+            <p:cNvPr id="71" name="pt71"/>
+            <p:cNvSpPr/>
+            <p:nvPr/>
+          </p:nvSpPr>
+          <p:spPr>
+            <a:xfrm>
+              <a:off x="5360897" y="4137953"/>
+              <a:ext cx="74350" cy="74350"/>
+            </a:xfrm>
+            <a:prstGeom prst="ellipse">
+              <a:avLst/>
+            </a:prstGeom>
+            <a:solidFill>
+              <a:srgbClr val="E7298A">
+                <a:alpha val="100000"/>
+              </a:srgbClr>
+            </a:solidFill>
+            <a:ln w="14727" cap="rnd">
+              <a:solidFill>
+                <a:srgbClr val="E7298A">
+                  <a:alpha val="100000"/>
+                </a:srgbClr>
+              </a:solidFill>
+              <a:prstDash val="solid"/>
+              <a:round/>
+            </a:ln>
+          </p:spPr>
+          <p:txBody>
+            <a:bodyPr/>
+            <a:lstStyle/>
+            <a:p/>
+          </p:txBody>
+        </p:sp>
+        <p:sp>
+          <p:nvSpPr>
+            <p:cNvPr id="72" name="pt72"/>
+            <p:cNvSpPr/>
+            <p:nvPr/>
+          </p:nvSpPr>
+          <p:spPr>
+            <a:xfrm>
+              <a:off x="1486316" y="4947655"/>
               <a:ext cx="74350" cy="74350"/>
             </a:xfrm>
             <a:prstGeom prst="ellipse">
@@ -3687,13 +5057,13 @@
         </p:sp>
         <p:sp>
           <p:nvSpPr>
-            <p:cNvPr id="37" name="pt37"/>
-            <p:cNvSpPr/>
-            <p:nvPr/>
-          </p:nvSpPr>
-          <p:spPr>
-            <a:xfrm>
-              <a:off x="1848576" y="4043688"/>
+            <p:cNvPr id="73" name="pt73"/>
+            <p:cNvSpPr/>
+            <p:nvPr/>
+          </p:nvSpPr>
+          <p:spPr>
+            <a:xfrm>
+              <a:off x="1744621" y="4493657"/>
               <a:ext cx="74350" cy="74350"/>
             </a:xfrm>
             <a:prstGeom prst="ellipse">
@@ -3722,13 +5092,13 @@
         </p:sp>
         <p:sp>
           <p:nvSpPr>
-            <p:cNvPr id="38" name="pt38"/>
-            <p:cNvSpPr/>
-            <p:nvPr/>
-          </p:nvSpPr>
-          <p:spPr>
-            <a:xfrm>
-              <a:off x="2166284" y="4688703"/>
+            <p:cNvPr id="74" name="pt74"/>
+            <p:cNvSpPr/>
+            <p:nvPr/>
+          </p:nvSpPr>
+          <p:spPr>
+            <a:xfrm>
+              <a:off x="2002927" y="4921153"/>
               <a:ext cx="74350" cy="74350"/>
             </a:xfrm>
             <a:prstGeom prst="ellipse">
@@ -3757,13 +5127,13 @@
         </p:sp>
         <p:sp>
           <p:nvSpPr>
-            <p:cNvPr id="39" name="pt39"/>
-            <p:cNvSpPr/>
-            <p:nvPr/>
-          </p:nvSpPr>
-          <p:spPr>
-            <a:xfrm>
-              <a:off x="2483993" y="5266615"/>
+            <p:cNvPr id="75" name="pt75"/>
+            <p:cNvSpPr/>
+            <p:nvPr/>
+          </p:nvSpPr>
+          <p:spPr>
+            <a:xfrm>
+              <a:off x="2261232" y="5304176"/>
               <a:ext cx="74350" cy="74350"/>
             </a:xfrm>
             <a:prstGeom prst="ellipse">
@@ -3792,13 +5162,13 @@
         </p:sp>
         <p:sp>
           <p:nvSpPr>
-            <p:cNvPr id="40" name="pt40"/>
-            <p:cNvSpPr/>
-            <p:nvPr/>
-          </p:nvSpPr>
-          <p:spPr>
-            <a:xfrm>
-              <a:off x="2801701" y="5323464"/>
+            <p:cNvPr id="76" name="pt76"/>
+            <p:cNvSpPr/>
+            <p:nvPr/>
+          </p:nvSpPr>
+          <p:spPr>
+            <a:xfrm>
+              <a:off x="2519538" y="5341854"/>
               <a:ext cx="74350" cy="74350"/>
             </a:xfrm>
             <a:prstGeom prst="ellipse">
@@ -3827,13 +5197,13 @@
         </p:sp>
         <p:sp>
           <p:nvSpPr>
-            <p:cNvPr id="41" name="pt41"/>
-            <p:cNvSpPr/>
-            <p:nvPr/>
-          </p:nvSpPr>
-          <p:spPr>
-            <a:xfrm>
-              <a:off x="3119409" y="5202403"/>
+            <p:cNvPr id="77" name="pt77"/>
+            <p:cNvSpPr/>
+            <p:nvPr/>
+          </p:nvSpPr>
+          <p:spPr>
+            <a:xfrm>
+              <a:off x="2777843" y="5261618"/>
               <a:ext cx="74350" cy="74350"/>
             </a:xfrm>
             <a:prstGeom prst="ellipse">
@@ -3862,13 +5232,13 @@
         </p:sp>
         <p:sp>
           <p:nvSpPr>
-            <p:cNvPr id="42" name="pt42"/>
-            <p:cNvSpPr/>
-            <p:nvPr/>
-          </p:nvSpPr>
-          <p:spPr>
-            <a:xfrm>
-              <a:off x="3437117" y="4886434"/>
+            <p:cNvPr id="78" name="pt78"/>
+            <p:cNvSpPr/>
+            <p:nvPr/>
+          </p:nvSpPr>
+          <p:spPr>
+            <a:xfrm>
+              <a:off x="3036148" y="5052203"/>
               <a:ext cx="74350" cy="74350"/>
             </a:xfrm>
             <a:prstGeom prst="ellipse">
@@ -3897,13 +5267,13 @@
         </p:sp>
         <p:sp>
           <p:nvSpPr>
-            <p:cNvPr id="43" name="pt43"/>
-            <p:cNvSpPr/>
-            <p:nvPr/>
-          </p:nvSpPr>
-          <p:spPr>
-            <a:xfrm>
-              <a:off x="3754825" y="4850714"/>
+            <p:cNvPr id="79" name="pt79"/>
+            <p:cNvSpPr/>
+            <p:nvPr/>
+          </p:nvSpPr>
+          <p:spPr>
+            <a:xfrm>
+              <a:off x="3294454" y="5028529"/>
               <a:ext cx="74350" cy="74350"/>
             </a:xfrm>
             <a:prstGeom prst="ellipse">
@@ -3932,13 +5302,13 @@
         </p:sp>
         <p:sp>
           <p:nvSpPr>
-            <p:cNvPr id="44" name="pt44"/>
-            <p:cNvSpPr/>
-            <p:nvPr/>
-          </p:nvSpPr>
-          <p:spPr>
-            <a:xfrm>
-              <a:off x="4072533" y="4975147"/>
+            <p:cNvPr id="80" name="pt80"/>
+            <p:cNvSpPr/>
+            <p:nvPr/>
+          </p:nvSpPr>
+          <p:spPr>
+            <a:xfrm>
+              <a:off x="3552759" y="5111000"/>
               <a:ext cx="74350" cy="74350"/>
             </a:xfrm>
             <a:prstGeom prst="ellipse">
@@ -3967,13 +5337,13 @@
         </p:sp>
         <p:sp>
           <p:nvSpPr>
-            <p:cNvPr id="45" name="pt45"/>
-            <p:cNvSpPr/>
-            <p:nvPr/>
-          </p:nvSpPr>
-          <p:spPr>
-            <a:xfrm>
-              <a:off x="4390241" y="4813825"/>
+            <p:cNvPr id="81" name="pt81"/>
+            <p:cNvSpPr/>
+            <p:nvPr/>
+          </p:nvSpPr>
+          <p:spPr>
+            <a:xfrm>
+              <a:off x="3811065" y="5004080"/>
               <a:ext cx="74350" cy="74350"/>
             </a:xfrm>
             <a:prstGeom prst="ellipse">
@@ -4002,13 +5372,13 @@
         </p:sp>
         <p:sp>
           <p:nvSpPr>
-            <p:cNvPr id="46" name="pt46"/>
-            <p:cNvSpPr/>
-            <p:nvPr/>
-          </p:nvSpPr>
-          <p:spPr>
-            <a:xfrm>
-              <a:off x="4707950" y="4904190"/>
+            <p:cNvPr id="82" name="pt82"/>
+            <p:cNvSpPr/>
+            <p:nvPr/>
+          </p:nvSpPr>
+          <p:spPr>
+            <a:xfrm>
+              <a:off x="4069370" y="5063972"/>
               <a:ext cx="74350" cy="74350"/>
             </a:xfrm>
             <a:prstGeom prst="ellipse">
@@ -4037,13 +5407,13 @@
         </p:sp>
         <p:sp>
           <p:nvSpPr>
-            <p:cNvPr id="47" name="pt47"/>
-            <p:cNvSpPr/>
-            <p:nvPr/>
-          </p:nvSpPr>
-          <p:spPr>
-            <a:xfrm>
-              <a:off x="5025658" y="4439218"/>
+            <p:cNvPr id="83" name="pt83"/>
+            <p:cNvSpPr/>
+            <p:nvPr/>
+          </p:nvSpPr>
+          <p:spPr>
+            <a:xfrm>
+              <a:off x="4327675" y="4755802"/>
               <a:ext cx="74350" cy="74350"/>
             </a:xfrm>
             <a:prstGeom prst="ellipse">
@@ -4072,13 +5442,13 @@
         </p:sp>
         <p:sp>
           <p:nvSpPr>
-            <p:cNvPr id="48" name="pt48"/>
-            <p:cNvSpPr/>
-            <p:nvPr/>
-          </p:nvSpPr>
-          <p:spPr>
-            <a:xfrm>
-              <a:off x="5343366" y="4402259"/>
+            <p:cNvPr id="84" name="pt84"/>
+            <p:cNvSpPr/>
+            <p:nvPr/>
+          </p:nvSpPr>
+          <p:spPr>
+            <a:xfrm>
+              <a:off x="4585981" y="4731307"/>
               <a:ext cx="74350" cy="74350"/>
             </a:xfrm>
             <a:prstGeom prst="ellipse">
@@ -4107,13 +5477,13 @@
         </p:sp>
         <p:sp>
           <p:nvSpPr>
-            <p:cNvPr id="49" name="pt49"/>
-            <p:cNvSpPr/>
-            <p:nvPr/>
-          </p:nvSpPr>
-          <p:spPr>
-            <a:xfrm>
-              <a:off x="5661074" y="4466403"/>
+            <p:cNvPr id="85" name="pt85"/>
+            <p:cNvSpPr/>
+            <p:nvPr/>
+          </p:nvSpPr>
+          <p:spPr>
+            <a:xfrm>
+              <a:off x="4844286" y="4773819"/>
               <a:ext cx="74350" cy="74350"/>
             </a:xfrm>
             <a:prstGeom prst="ellipse">
@@ -4142,13 +5512,13 @@
         </p:sp>
         <p:sp>
           <p:nvSpPr>
-            <p:cNvPr id="50" name="pt50"/>
-            <p:cNvSpPr/>
-            <p:nvPr/>
-          </p:nvSpPr>
-          <p:spPr>
-            <a:xfrm>
-              <a:off x="5978782" y="5230001"/>
+            <p:cNvPr id="86" name="pt86"/>
+            <p:cNvSpPr/>
+            <p:nvPr/>
+          </p:nvSpPr>
+          <p:spPr>
+            <a:xfrm>
+              <a:off x="5102592" y="5279910"/>
               <a:ext cx="74350" cy="74350"/>
             </a:xfrm>
             <a:prstGeom prst="ellipse">
@@ -4177,13 +5547,13 @@
         </p:sp>
         <p:sp>
           <p:nvSpPr>
-            <p:cNvPr id="51" name="pt51"/>
-            <p:cNvSpPr/>
-            <p:nvPr/>
-          </p:nvSpPr>
-          <p:spPr>
-            <a:xfrm>
-              <a:off x="6296490" y="4717265"/>
+            <p:cNvPr id="87" name="pt87"/>
+            <p:cNvSpPr/>
+            <p:nvPr/>
+          </p:nvSpPr>
+          <p:spPr>
+            <a:xfrm>
+              <a:off x="5360897" y="4940083"/>
               <a:ext cx="74350" cy="74350"/>
             </a:xfrm>
             <a:prstGeom prst="ellipse">
@@ -4212,13 +5582,13 @@
         </p:sp>
         <p:sp>
           <p:nvSpPr>
-            <p:cNvPr id="52" name="pt52"/>
-            <p:cNvSpPr/>
-            <p:nvPr/>
-          </p:nvSpPr>
-          <p:spPr>
-            <a:xfrm>
-              <a:off x="1530868" y="3914102"/>
+            <p:cNvPr id="88" name="pt88"/>
+            <p:cNvSpPr/>
+            <p:nvPr/>
+          </p:nvSpPr>
+          <p:spPr>
+            <a:xfrm>
+              <a:off x="1486316" y="4407771"/>
               <a:ext cx="74350" cy="74350"/>
             </a:xfrm>
             <a:prstGeom prst="ellipse">
@@ -4247,13 +5617,13 @@
         </p:sp>
         <p:sp>
           <p:nvSpPr>
-            <p:cNvPr id="53" name="pt53"/>
-            <p:cNvSpPr/>
-            <p:nvPr/>
-          </p:nvSpPr>
-          <p:spPr>
-            <a:xfrm>
-              <a:off x="1848576" y="4554365"/>
+            <p:cNvPr id="89" name="pt89"/>
+            <p:cNvSpPr/>
+            <p:nvPr/>
+          </p:nvSpPr>
+          <p:spPr>
+            <a:xfrm>
+              <a:off x="1744621" y="4832118"/>
               <a:ext cx="74350" cy="74350"/>
             </a:xfrm>
             <a:prstGeom prst="ellipse">
@@ -4282,13 +5652,13 @@
         </p:sp>
         <p:sp>
           <p:nvSpPr>
-            <p:cNvPr id="54" name="pt54"/>
-            <p:cNvSpPr/>
-            <p:nvPr/>
-          </p:nvSpPr>
-          <p:spPr>
-            <a:xfrm>
-              <a:off x="2166284" y="5109405"/>
+            <p:cNvPr id="90" name="pt90"/>
+            <p:cNvSpPr/>
+            <p:nvPr/>
+          </p:nvSpPr>
+          <p:spPr>
+            <a:xfrm>
+              <a:off x="2002927" y="5199982"/>
               <a:ext cx="74350" cy="74350"/>
             </a:xfrm>
             <a:prstGeom prst="ellipse">
@@ -4317,13 +5687,13 @@
         </p:sp>
         <p:sp>
           <p:nvSpPr>
-            <p:cNvPr id="55" name="pt55"/>
-            <p:cNvSpPr/>
-            <p:nvPr/>
-          </p:nvSpPr>
-          <p:spPr>
-            <a:xfrm>
-              <a:off x="2483993" y="5248165"/>
+            <p:cNvPr id="91" name="pt91"/>
+            <p:cNvSpPr/>
+            <p:nvPr/>
+          </p:nvSpPr>
+          <p:spPr>
+            <a:xfrm>
+              <a:off x="2261232" y="5291948"/>
               <a:ext cx="74350" cy="74350"/>
             </a:xfrm>
             <a:prstGeom prst="ellipse">
@@ -4352,13 +5722,13 @@
         </p:sp>
         <p:sp>
           <p:nvSpPr>
-            <p:cNvPr id="56" name="pt56"/>
-            <p:cNvSpPr/>
-            <p:nvPr/>
-          </p:nvSpPr>
-          <p:spPr>
-            <a:xfrm>
-              <a:off x="2801701" y="5078812"/>
+            <p:cNvPr id="92" name="pt92"/>
+            <p:cNvSpPr/>
+            <p:nvPr/>
+          </p:nvSpPr>
+          <p:spPr>
+            <a:xfrm>
+              <a:off x="2519538" y="5179706"/>
               <a:ext cx="74350" cy="74350"/>
             </a:xfrm>
             <a:prstGeom prst="ellipse">
@@ -4387,13 +5757,13 @@
         </p:sp>
         <p:sp>
           <p:nvSpPr>
-            <p:cNvPr id="57" name="pt57"/>
-            <p:cNvSpPr/>
-            <p:nvPr/>
-          </p:nvSpPr>
-          <p:spPr>
-            <a:xfrm>
-              <a:off x="3119409" y="4537247"/>
+            <p:cNvPr id="93" name="pt93"/>
+            <p:cNvSpPr/>
+            <p:nvPr/>
+          </p:nvSpPr>
+          <p:spPr>
+            <a:xfrm>
+              <a:off x="2777843" y="4820773"/>
               <a:ext cx="74350" cy="74350"/>
             </a:xfrm>
             <a:prstGeom prst="ellipse">
@@ -4422,13 +5792,13 @@
         </p:sp>
         <p:sp>
           <p:nvSpPr>
-            <p:cNvPr id="58" name="pt58"/>
-            <p:cNvSpPr/>
-            <p:nvPr/>
-          </p:nvSpPr>
-          <p:spPr>
-            <a:xfrm>
-              <a:off x="3437117" y="4914922"/>
+            <p:cNvPr id="94" name="pt94"/>
+            <p:cNvSpPr/>
+            <p:nvPr/>
+          </p:nvSpPr>
+          <p:spPr>
+            <a:xfrm>
+              <a:off x="3036148" y="5071085"/>
               <a:ext cx="74350" cy="74350"/>
             </a:xfrm>
             <a:prstGeom prst="ellipse">
@@ -4457,13 +5827,13 @@
         </p:sp>
         <p:sp>
           <p:nvSpPr>
-            <p:cNvPr id="59" name="pt59"/>
-            <p:cNvSpPr/>
-            <p:nvPr/>
-          </p:nvSpPr>
-          <p:spPr>
-            <a:xfrm>
-              <a:off x="3754825" y="4386833"/>
+            <p:cNvPr id="95" name="pt95"/>
+            <p:cNvSpPr/>
+            <p:nvPr/>
+          </p:nvSpPr>
+          <p:spPr>
+            <a:xfrm>
+              <a:off x="3294454" y="4721083"/>
               <a:ext cx="74350" cy="74350"/>
             </a:xfrm>
             <a:prstGeom prst="ellipse">
@@ -4492,13 +5862,13 @@
         </p:sp>
         <p:sp>
           <p:nvSpPr>
-            <p:cNvPr id="60" name="pt60"/>
-            <p:cNvSpPr/>
-            <p:nvPr/>
-          </p:nvSpPr>
-          <p:spPr>
-            <a:xfrm>
-              <a:off x="4072533" y="4363888"/>
+            <p:cNvPr id="96" name="pt96"/>
+            <p:cNvSpPr/>
+            <p:nvPr/>
+          </p:nvSpPr>
+          <p:spPr>
+            <a:xfrm>
+              <a:off x="3552759" y="4705876"/>
               <a:ext cx="74350" cy="74350"/>
             </a:xfrm>
             <a:prstGeom prst="ellipse">
@@ -4527,13 +5897,13 @@
         </p:sp>
         <p:sp>
           <p:nvSpPr>
-            <p:cNvPr id="61" name="pt61"/>
-            <p:cNvSpPr/>
-            <p:nvPr/>
-          </p:nvSpPr>
-          <p:spPr>
-            <a:xfrm>
-              <a:off x="4390241" y="5015805"/>
+            <p:cNvPr id="97" name="pt97"/>
+            <p:cNvSpPr/>
+            <p:nvPr/>
+          </p:nvSpPr>
+          <p:spPr>
+            <a:xfrm>
+              <a:off x="3811065" y="5137947"/>
               <a:ext cx="74350" cy="74350"/>
             </a:xfrm>
             <a:prstGeom prst="ellipse">
@@ -4562,13 +5932,13 @@
         </p:sp>
         <p:sp>
           <p:nvSpPr>
-            <p:cNvPr id="62" name="pt62"/>
-            <p:cNvSpPr/>
-            <p:nvPr/>
-          </p:nvSpPr>
-          <p:spPr>
-            <a:xfrm>
-              <a:off x="4707950" y="5385104"/>
+            <p:cNvPr id="98" name="pt98"/>
+            <p:cNvSpPr/>
+            <p:nvPr/>
+          </p:nvSpPr>
+          <p:spPr>
+            <a:xfrm>
+              <a:off x="4069370" y="5382707"/>
               <a:ext cx="74350" cy="74350"/>
             </a:xfrm>
             <a:prstGeom prst="ellipse">
@@ -4597,13 +5967,13 @@
         </p:sp>
         <p:sp>
           <p:nvSpPr>
-            <p:cNvPr id="63" name="pt63"/>
-            <p:cNvSpPr/>
-            <p:nvPr/>
-          </p:nvSpPr>
-          <p:spPr>
-            <a:xfrm>
-              <a:off x="5025658" y="4914922"/>
+            <p:cNvPr id="99" name="pt99"/>
+            <p:cNvSpPr/>
+            <p:nvPr/>
+          </p:nvSpPr>
+          <p:spPr>
+            <a:xfrm>
+              <a:off x="4327675" y="5071085"/>
               <a:ext cx="74350" cy="74350"/>
             </a:xfrm>
             <a:prstGeom prst="ellipse">
@@ -4632,13 +6002,13 @@
         </p:sp>
         <p:sp>
           <p:nvSpPr>
-            <p:cNvPr id="64" name="pt64"/>
-            <p:cNvSpPr/>
-            <p:nvPr/>
-          </p:nvSpPr>
-          <p:spPr>
-            <a:xfrm>
-              <a:off x="5343366" y="4765236"/>
+            <p:cNvPr id="100" name="pt100"/>
+            <p:cNvSpPr/>
+            <p:nvPr/>
+          </p:nvSpPr>
+          <p:spPr>
+            <a:xfrm>
+              <a:off x="4585981" y="4971877"/>
               <a:ext cx="74350" cy="74350"/>
             </a:xfrm>
             <a:prstGeom prst="ellipse">
@@ -4667,13 +6037,13 @@
         </p:sp>
         <p:sp>
           <p:nvSpPr>
-            <p:cNvPr id="65" name="pt65"/>
-            <p:cNvSpPr/>
-            <p:nvPr/>
-          </p:nvSpPr>
-          <p:spPr>
-            <a:xfrm>
-              <a:off x="5661074" y="4914922"/>
+            <p:cNvPr id="101" name="pt101"/>
+            <p:cNvSpPr/>
+            <p:nvPr/>
+          </p:nvSpPr>
+          <p:spPr>
+            <a:xfrm>
+              <a:off x="4844286" y="5071085"/>
               <a:ext cx="74350" cy="74350"/>
             </a:xfrm>
             <a:prstGeom prst="ellipse">
@@ -4702,13 +6072,13 @@
         </p:sp>
         <p:sp>
           <p:nvSpPr>
-            <p:cNvPr id="66" name="pt66"/>
-            <p:cNvSpPr/>
-            <p:nvPr/>
-          </p:nvSpPr>
-          <p:spPr>
-            <a:xfrm>
-              <a:off x="5978782" y="3742200"/>
+            <p:cNvPr id="102" name="pt102"/>
+            <p:cNvSpPr/>
+            <p:nvPr/>
+          </p:nvSpPr>
+          <p:spPr>
+            <a:xfrm>
+              <a:off x="5102592" y="4293839"/>
               <a:ext cx="74350" cy="74350"/>
             </a:xfrm>
             <a:prstGeom prst="ellipse">
@@ -4737,13 +6107,13 @@
         </p:sp>
         <p:sp>
           <p:nvSpPr>
-            <p:cNvPr id="67" name="pt67"/>
-            <p:cNvSpPr/>
-            <p:nvPr/>
-          </p:nvSpPr>
-          <p:spPr>
-            <a:xfrm>
-              <a:off x="6296490" y="1822505"/>
+            <p:cNvPr id="103" name="pt103"/>
+            <p:cNvSpPr/>
+            <p:nvPr/>
+          </p:nvSpPr>
+          <p:spPr>
+            <a:xfrm>
+              <a:off x="5360897" y="3021523"/>
               <a:ext cx="74350" cy="74350"/>
             </a:xfrm>
             <a:prstGeom prst="ellipse">
@@ -4772,13 +6142,13 @@
         </p:sp>
         <p:sp>
           <p:nvSpPr>
-            <p:cNvPr id="68" name="pt68"/>
-            <p:cNvSpPr/>
-            <p:nvPr/>
-          </p:nvSpPr>
-          <p:spPr>
-            <a:xfrm>
-              <a:off x="1530868" y="4868432"/>
+            <p:cNvPr id="104" name="pt104"/>
+            <p:cNvSpPr/>
+            <p:nvPr/>
+          </p:nvSpPr>
+          <p:spPr>
+            <a:xfrm>
+              <a:off x="1486316" y="5040272"/>
               <a:ext cx="74350" cy="74350"/>
             </a:xfrm>
             <a:prstGeom prst="ellipse">
@@ -4807,13 +6177,13 @@
         </p:sp>
         <p:sp>
           <p:nvSpPr>
-            <p:cNvPr id="69" name="pt69"/>
-            <p:cNvSpPr/>
-            <p:nvPr/>
-          </p:nvSpPr>
-          <p:spPr>
-            <a:xfrm>
-              <a:off x="1848576" y="5002973"/>
+            <p:cNvPr id="105" name="pt105"/>
+            <p:cNvSpPr/>
+            <p:nvPr/>
+          </p:nvSpPr>
+          <p:spPr>
+            <a:xfrm>
+              <a:off x="1744621" y="5129442"/>
               <a:ext cx="74350" cy="74350"/>
             </a:xfrm>
             <a:prstGeom prst="ellipse">
@@ -4842,13 +6212,13 @@
         </p:sp>
         <p:sp>
           <p:nvSpPr>
-            <p:cNvPr id="70" name="pt70"/>
-            <p:cNvSpPr/>
-            <p:nvPr/>
-          </p:nvSpPr>
-          <p:spPr>
-            <a:xfrm>
-              <a:off x="2166284" y="4668460"/>
+            <p:cNvPr id="106" name="pt106"/>
+            <p:cNvSpPr/>
+            <p:nvPr/>
+          </p:nvSpPr>
+          <p:spPr>
+            <a:xfrm>
+              <a:off x="2002927" y="4907737"/>
               <a:ext cx="74350" cy="74350"/>
             </a:xfrm>
             <a:prstGeom prst="ellipse">
@@ -4877,13 +6247,13 @@
         </p:sp>
         <p:sp>
           <p:nvSpPr>
-            <p:cNvPr id="71" name="pt71"/>
-            <p:cNvSpPr/>
-            <p:nvPr/>
-          </p:nvSpPr>
-          <p:spPr>
-            <a:xfrm>
-              <a:off x="2483993" y="5256275"/>
+            <p:cNvPr id="107" name="pt107"/>
+            <p:cNvSpPr/>
+            <p:nvPr/>
+          </p:nvSpPr>
+          <p:spPr>
+            <a:xfrm>
+              <a:off x="2261232" y="5297323"/>
               <a:ext cx="74350" cy="74350"/>
             </a:xfrm>
             <a:prstGeom prst="ellipse">
@@ -4912,13 +6282,13 @@
         </p:sp>
         <p:sp>
           <p:nvSpPr>
-            <p:cNvPr id="72" name="pt72"/>
-            <p:cNvSpPr/>
-            <p:nvPr/>
-          </p:nvSpPr>
-          <p:spPr>
-            <a:xfrm>
-              <a:off x="2801701" y="5227396"/>
+            <p:cNvPr id="108" name="pt108"/>
+            <p:cNvSpPr/>
+            <p:nvPr/>
+          </p:nvSpPr>
+          <p:spPr>
+            <a:xfrm>
+              <a:off x="2519538" y="5278183"/>
               <a:ext cx="74350" cy="74350"/>
             </a:xfrm>
             <a:prstGeom prst="ellipse">
@@ -4947,13 +6317,13 @@
         </p:sp>
         <p:sp>
           <p:nvSpPr>
-            <p:cNvPr id="73" name="pt73"/>
-            <p:cNvSpPr/>
-            <p:nvPr/>
-          </p:nvSpPr>
-          <p:spPr>
-            <a:xfrm>
-              <a:off x="3119409" y="4967108"/>
+            <p:cNvPr id="109" name="pt109"/>
+            <p:cNvSpPr/>
+            <p:nvPr/>
+          </p:nvSpPr>
+          <p:spPr>
+            <a:xfrm>
+              <a:off x="2777843" y="5105672"/>
               <a:ext cx="74350" cy="74350"/>
             </a:xfrm>
             <a:prstGeom prst="ellipse">
@@ -4982,13 +6352,13 @@
         </p:sp>
         <p:sp>
           <p:nvSpPr>
-            <p:cNvPr id="74" name="pt74"/>
-            <p:cNvSpPr/>
-            <p:nvPr/>
-          </p:nvSpPr>
-          <p:spPr>
-            <a:xfrm>
-              <a:off x="3437117" y="4623426"/>
+            <p:cNvPr id="110" name="pt110"/>
+            <p:cNvSpPr/>
+            <p:nvPr/>
+          </p:nvSpPr>
+          <p:spPr>
+            <a:xfrm>
+              <a:off x="3036148" y="4877889"/>
               <a:ext cx="74350" cy="74350"/>
             </a:xfrm>
             <a:prstGeom prst="ellipse">
@@ -5017,13 +6387,13 @@
         </p:sp>
         <p:sp>
           <p:nvSpPr>
-            <p:cNvPr id="75" name="pt75"/>
-            <p:cNvSpPr/>
-            <p:nvPr/>
-          </p:nvSpPr>
-          <p:spPr>
-            <a:xfrm>
-              <a:off x="3754825" y="4613945"/>
+            <p:cNvPr id="111" name="pt111"/>
+            <p:cNvSpPr/>
+            <p:nvPr/>
+          </p:nvSpPr>
+          <p:spPr>
+            <a:xfrm>
+              <a:off x="3294454" y="4871606"/>
               <a:ext cx="74350" cy="74350"/>
             </a:xfrm>
             <a:prstGeom prst="ellipse">
@@ -5052,13 +6422,13 @@
         </p:sp>
         <p:sp>
           <p:nvSpPr>
-            <p:cNvPr id="76" name="pt76"/>
-            <p:cNvSpPr/>
-            <p:nvPr/>
-          </p:nvSpPr>
-          <p:spPr>
-            <a:xfrm>
-              <a:off x="4072533" y="5053683"/>
+            <p:cNvPr id="112" name="pt112"/>
+            <p:cNvSpPr/>
+            <p:nvPr/>
+          </p:nvSpPr>
+          <p:spPr>
+            <a:xfrm>
+              <a:off x="3552759" y="5163051"/>
               <a:ext cx="74350" cy="74350"/>
             </a:xfrm>
             <a:prstGeom prst="ellipse">
@@ -5087,13 +6457,13 @@
         </p:sp>
         <p:sp>
           <p:nvSpPr>
-            <p:cNvPr id="77" name="pt77"/>
-            <p:cNvSpPr/>
-            <p:nvPr/>
-          </p:nvSpPr>
-          <p:spPr>
-            <a:xfrm>
-              <a:off x="4390241" y="4648500"/>
+            <p:cNvPr id="113" name="pt113"/>
+            <p:cNvSpPr/>
+            <p:nvPr/>
+          </p:nvSpPr>
+          <p:spPr>
+            <a:xfrm>
+              <a:off x="3811065" y="4894508"/>
               <a:ext cx="74350" cy="74350"/>
             </a:xfrm>
             <a:prstGeom prst="ellipse">
@@ -5122,13 +6492,13 @@
         </p:sp>
         <p:sp>
           <p:nvSpPr>
-            <p:cNvPr id="78" name="pt78"/>
-            <p:cNvSpPr/>
-            <p:nvPr/>
-          </p:nvSpPr>
-          <p:spPr>
-            <a:xfrm>
-              <a:off x="4707950" y="4723723"/>
+            <p:cNvPr id="114" name="pt114"/>
+            <p:cNvSpPr/>
+            <p:nvPr/>
+          </p:nvSpPr>
+          <p:spPr>
+            <a:xfrm>
+              <a:off x="4069370" y="4944364"/>
               <a:ext cx="74350" cy="74350"/>
             </a:xfrm>
             <a:prstGeom prst="ellipse">
@@ -5157,13 +6527,13 @@
         </p:sp>
         <p:sp>
           <p:nvSpPr>
-            <p:cNvPr id="79" name="pt79"/>
-            <p:cNvSpPr/>
-            <p:nvPr/>
-          </p:nvSpPr>
-          <p:spPr>
-            <a:xfrm>
-              <a:off x="5025658" y="4530176"/>
+            <p:cNvPr id="115" name="pt115"/>
+            <p:cNvSpPr/>
+            <p:nvPr/>
+          </p:nvSpPr>
+          <p:spPr>
+            <a:xfrm>
+              <a:off x="4327675" y="4816086"/>
               <a:ext cx="74350" cy="74350"/>
             </a:xfrm>
             <a:prstGeom prst="ellipse">
@@ -5192,13 +6562,13 @@
         </p:sp>
         <p:sp>
           <p:nvSpPr>
-            <p:cNvPr id="80" name="pt80"/>
-            <p:cNvSpPr/>
-            <p:nvPr/>
-          </p:nvSpPr>
-          <p:spPr>
-            <a:xfrm>
-              <a:off x="5343366" y="4451210"/>
+            <p:cNvPr id="116" name="pt116"/>
+            <p:cNvSpPr/>
+            <p:nvPr/>
+          </p:nvSpPr>
+          <p:spPr>
+            <a:xfrm>
+              <a:off x="4585981" y="4763750"/>
               <a:ext cx="74350" cy="74350"/>
             </a:xfrm>
             <a:prstGeom prst="ellipse">
@@ -5227,13 +6597,13 @@
         </p:sp>
         <p:sp>
           <p:nvSpPr>
-            <p:cNvPr id="81" name="pt81"/>
-            <p:cNvSpPr/>
-            <p:nvPr/>
-          </p:nvSpPr>
-          <p:spPr>
-            <a:xfrm>
-              <a:off x="5661074" y="3932256"/>
+            <p:cNvPr id="117" name="pt117"/>
+            <p:cNvSpPr/>
+            <p:nvPr/>
+          </p:nvSpPr>
+          <p:spPr>
+            <a:xfrm>
+              <a:off x="4844286" y="4419803"/>
               <a:ext cx="74350" cy="74350"/>
             </a:xfrm>
             <a:prstGeom prst="ellipse">
@@ -5262,13 +6632,13 @@
         </p:sp>
         <p:sp>
           <p:nvSpPr>
-            <p:cNvPr id="82" name="pt82"/>
-            <p:cNvSpPr/>
-            <p:nvPr/>
-          </p:nvSpPr>
-          <p:spPr>
-            <a:xfrm>
-              <a:off x="5978782" y="4858202"/>
+            <p:cNvPr id="118" name="pt118"/>
+            <p:cNvSpPr/>
+            <p:nvPr/>
+          </p:nvSpPr>
+          <p:spPr>
+            <a:xfrm>
+              <a:off x="5102592" y="5033492"/>
               <a:ext cx="74350" cy="74350"/>
             </a:xfrm>
             <a:prstGeom prst="ellipse">
@@ -5297,13 +6667,13 @@
         </p:sp>
         <p:sp>
           <p:nvSpPr>
-            <p:cNvPr id="83" name="pt83"/>
-            <p:cNvSpPr/>
-            <p:nvPr/>
-          </p:nvSpPr>
-          <p:spPr>
-            <a:xfrm>
-              <a:off x="6296490" y="4504977"/>
+            <p:cNvPr id="119" name="pt119"/>
+            <p:cNvSpPr/>
+            <p:nvPr/>
+          </p:nvSpPr>
+          <p:spPr>
+            <a:xfrm>
+              <a:off x="5360897" y="4799385"/>
               <a:ext cx="74350" cy="74350"/>
             </a:xfrm>
             <a:prstGeom prst="ellipse">
@@ -5332,13 +6702,13 @@
         </p:sp>
         <p:sp>
           <p:nvSpPr>
-            <p:cNvPr id="84" name="tx84"/>
-            <p:cNvSpPr/>
-            <p:nvPr/>
-          </p:nvSpPr>
-          <p:spPr>
-            <a:xfrm>
-              <a:off x="1110965" y="5361128"/>
+            <p:cNvPr id="120" name="tx120"/>
+            <p:cNvSpPr/>
+            <p:nvPr/>
+          </p:nvSpPr>
+          <p:spPr>
+            <a:xfrm>
+              <a:off x="1110965" y="5356889"/>
               <a:ext cx="116311" cy="133228"/>
             </a:xfrm>
             <a:prstGeom prst="rect">
@@ -5375,13 +6745,13 @@
         </p:sp>
         <p:sp>
           <p:nvSpPr>
-            <p:cNvPr id="85" name="tx85"/>
-            <p:cNvSpPr/>
-            <p:nvPr/>
-          </p:nvSpPr>
-          <p:spPr>
-            <a:xfrm>
-              <a:off x="1110965" y="3949782"/>
+            <p:cNvPr id="121" name="tx121"/>
+            <p:cNvSpPr/>
+            <p:nvPr/>
+          </p:nvSpPr>
+          <p:spPr>
+            <a:xfrm>
+              <a:off x="1110965" y="4421491"/>
               <a:ext cx="116311" cy="133228"/>
             </a:xfrm>
             <a:prstGeom prst="rect">
@@ -5418,13 +6788,13 @@
         </p:sp>
         <p:sp>
           <p:nvSpPr>
-            <p:cNvPr id="86" name="tx86"/>
-            <p:cNvSpPr/>
-            <p:nvPr/>
-          </p:nvSpPr>
-          <p:spPr>
-            <a:xfrm>
-              <a:off x="994653" y="2538436"/>
+            <p:cNvPr id="122" name="tx122"/>
+            <p:cNvSpPr/>
+            <p:nvPr/>
+          </p:nvSpPr>
+          <p:spPr>
+            <a:xfrm>
+              <a:off x="994653" y="3486093"/>
               <a:ext cx="232623" cy="133228"/>
             </a:xfrm>
             <a:prstGeom prst="rect">
@@ -5461,13 +6831,99 @@
         </p:sp>
         <p:sp>
           <p:nvSpPr>
-            <p:cNvPr id="87" name="tx87"/>
-            <p:cNvSpPr/>
-            <p:nvPr/>
-          </p:nvSpPr>
-          <p:spPr>
-            <a:xfrm>
-              <a:off x="1335420" y="5704179"/>
+            <p:cNvPr id="123" name="tx123"/>
+            <p:cNvSpPr/>
+            <p:nvPr/>
+          </p:nvSpPr>
+          <p:spPr>
+            <a:xfrm>
+              <a:off x="994653" y="2550695"/>
+              <a:ext cx="232623" cy="133228"/>
+            </a:xfrm>
+            <a:prstGeom prst="rect">
+              <a:avLst/>
+            </a:prstGeom>
+            <a:noFill/>
+          </p:spPr>
+          <p:txBody>
+            <a:bodyPr lIns="0" rIns="0" tIns="0" bIns="0" anchorCtr="1" anchor="ctr" wrap="none"/>
+            <a:lstStyle/>
+            <a:p>
+              <a:pPr algn="l" marL="0" marR="0" indent="0">
+                <a:spcBef>
+                  <a:spcPts val="0"/>
+                </a:spcBef>
+                <a:spcAft>
+                  <a:spcPts val="0"/>
+                </a:spcAft>
+              </a:pPr>
+              <a:r>
+                <a:rPr sz="1440" i="0" b="0">
+                  <a:solidFill>
+                    <a:srgbClr val="4D4D4D">
+                      <a:alpha val="100000"/>
+                    </a:srgbClr>
+                  </a:solidFill>
+                  <a:latin typeface="DejaVu Sans"/>
+                  <a:cs typeface="DejaVu Sans"/>
+                </a:rPr>
+                <a:t>15</a:t>
+              </a:r>
+            </a:p>
+          </p:txBody>
+        </p:sp>
+        <p:sp>
+          <p:nvSpPr>
+            <p:cNvPr id="124" name="tx124"/>
+            <p:cNvSpPr/>
+            <p:nvPr/>
+          </p:nvSpPr>
+          <p:spPr>
+            <a:xfrm>
+              <a:off x="994653" y="1615297"/>
+              <a:ext cx="232623" cy="133228"/>
+            </a:xfrm>
+            <a:prstGeom prst="rect">
+              <a:avLst/>
+            </a:prstGeom>
+            <a:noFill/>
+          </p:spPr>
+          <p:txBody>
+            <a:bodyPr lIns="0" rIns="0" tIns="0" bIns="0" anchorCtr="1" anchor="ctr" wrap="none"/>
+            <a:lstStyle/>
+            <a:p>
+              <a:pPr algn="l" marL="0" marR="0" indent="0">
+                <a:spcBef>
+                  <a:spcPts val="0"/>
+                </a:spcBef>
+                <a:spcAft>
+                  <a:spcPts val="0"/>
+                </a:spcAft>
+              </a:pPr>
+              <a:r>
+                <a:rPr sz="1440" i="0" b="0">
+                  <a:solidFill>
+                    <a:srgbClr val="4D4D4D">
+                      <a:alpha val="100000"/>
+                    </a:srgbClr>
+                  </a:solidFill>
+                  <a:latin typeface="DejaVu Sans"/>
+                  <a:cs typeface="DejaVu Sans"/>
+                </a:rPr>
+                <a:t>20</a:t>
+              </a:r>
+            </a:p>
+          </p:txBody>
+        </p:sp>
+        <p:sp>
+          <p:nvSpPr>
+            <p:cNvPr id="125" name="tx125"/>
+            <p:cNvSpPr/>
+            <p:nvPr/>
+          </p:nvSpPr>
+          <p:spPr>
+            <a:xfrm>
+              <a:off x="1290868" y="5704179"/>
               <a:ext cx="465246" cy="133228"/>
             </a:xfrm>
             <a:prstGeom prst="rect">
@@ -5504,13 +6960,13 @@
         </p:sp>
         <p:sp>
           <p:nvSpPr>
-            <p:cNvPr id="88" name="tx88"/>
-            <p:cNvSpPr/>
-            <p:nvPr/>
-          </p:nvSpPr>
-          <p:spPr>
-            <a:xfrm>
-              <a:off x="1970836" y="5704179"/>
+            <p:cNvPr id="126" name="tx126"/>
+            <p:cNvSpPr/>
+            <p:nvPr/>
+          </p:nvSpPr>
+          <p:spPr>
+            <a:xfrm>
+              <a:off x="1807478" y="5704179"/>
               <a:ext cx="465246" cy="133228"/>
             </a:xfrm>
             <a:prstGeom prst="rect">
@@ -5547,13 +7003,13 @@
         </p:sp>
         <p:sp>
           <p:nvSpPr>
-            <p:cNvPr id="89" name="tx89"/>
-            <p:cNvSpPr/>
-            <p:nvPr/>
-          </p:nvSpPr>
-          <p:spPr>
-            <a:xfrm>
-              <a:off x="2606252" y="5704179"/>
+            <p:cNvPr id="127" name="tx127"/>
+            <p:cNvSpPr/>
+            <p:nvPr/>
+          </p:nvSpPr>
+          <p:spPr>
+            <a:xfrm>
+              <a:off x="2324089" y="5704179"/>
               <a:ext cx="465246" cy="133228"/>
             </a:xfrm>
             <a:prstGeom prst="rect">
@@ -5590,13 +7046,13 @@
         </p:sp>
         <p:sp>
           <p:nvSpPr>
-            <p:cNvPr id="90" name="tx90"/>
-            <p:cNvSpPr/>
-            <p:nvPr/>
-          </p:nvSpPr>
-          <p:spPr>
-            <a:xfrm>
-              <a:off x="3241669" y="5704179"/>
+            <p:cNvPr id="128" name="tx128"/>
+            <p:cNvSpPr/>
+            <p:nvPr/>
+          </p:nvSpPr>
+          <p:spPr>
+            <a:xfrm>
+              <a:off x="2840700" y="5704179"/>
               <a:ext cx="465246" cy="133228"/>
             </a:xfrm>
             <a:prstGeom prst="rect">
@@ -5633,13 +7089,13 @@
         </p:sp>
         <p:sp>
           <p:nvSpPr>
-            <p:cNvPr id="91" name="tx91"/>
-            <p:cNvSpPr/>
-            <p:nvPr/>
-          </p:nvSpPr>
-          <p:spPr>
-            <a:xfrm>
-              <a:off x="3877085" y="5704179"/>
+            <p:cNvPr id="129" name="tx129"/>
+            <p:cNvSpPr/>
+            <p:nvPr/>
+          </p:nvSpPr>
+          <p:spPr>
+            <a:xfrm>
+              <a:off x="3357311" y="5704179"/>
               <a:ext cx="465246" cy="133228"/>
             </a:xfrm>
             <a:prstGeom prst="rect">
@@ -5676,13 +7132,13 @@
         </p:sp>
         <p:sp>
           <p:nvSpPr>
-            <p:cNvPr id="92" name="tx92"/>
-            <p:cNvSpPr/>
-            <p:nvPr/>
-          </p:nvSpPr>
-          <p:spPr>
-            <a:xfrm>
-              <a:off x="4512501" y="5704179"/>
+            <p:cNvPr id="130" name="tx130"/>
+            <p:cNvSpPr/>
+            <p:nvPr/>
+          </p:nvSpPr>
+          <p:spPr>
+            <a:xfrm>
+              <a:off x="3873922" y="5704179"/>
               <a:ext cx="465246" cy="133228"/>
             </a:xfrm>
             <a:prstGeom prst="rect">
@@ -5719,13 +7175,13 @@
         </p:sp>
         <p:sp>
           <p:nvSpPr>
-            <p:cNvPr id="93" name="tx93"/>
-            <p:cNvSpPr/>
-            <p:nvPr/>
-          </p:nvSpPr>
-          <p:spPr>
-            <a:xfrm>
-              <a:off x="5147918" y="5704179"/>
+            <p:cNvPr id="131" name="tx131"/>
+            <p:cNvSpPr/>
+            <p:nvPr/>
+          </p:nvSpPr>
+          <p:spPr>
+            <a:xfrm>
+              <a:off x="4390533" y="5704179"/>
               <a:ext cx="465246" cy="133228"/>
             </a:xfrm>
             <a:prstGeom prst="rect">
@@ -5762,13 +7218,13 @@
         </p:sp>
         <p:sp>
           <p:nvSpPr>
-            <p:cNvPr id="94" name="tx94"/>
-            <p:cNvSpPr/>
-            <p:nvPr/>
-          </p:nvSpPr>
-          <p:spPr>
-            <a:xfrm>
-              <a:off x="5783334" y="5704179"/>
+            <p:cNvPr id="132" name="tx132"/>
+            <p:cNvSpPr/>
+            <p:nvPr/>
+          </p:nvSpPr>
+          <p:spPr>
+            <a:xfrm>
+              <a:off x="4907143" y="5704179"/>
               <a:ext cx="465246" cy="133228"/>
             </a:xfrm>
             <a:prstGeom prst="rect">
@@ -5805,7 +7261,7 @@
         </p:sp>
         <p:sp>
           <p:nvSpPr>
-            <p:cNvPr id="95" name="tx95"/>
+            <p:cNvPr id="133" name="tx133"/>
             <p:cNvSpPr/>
             <p:nvPr/>
           </p:nvSpPr>
@@ -5848,13 +7304,13 @@
         </p:sp>
         <p:sp>
           <p:nvSpPr>
-            <p:cNvPr id="96" name="pl96"/>
-            <p:cNvSpPr/>
-            <p:nvPr/>
-          </p:nvSpPr>
-          <p:spPr>
-            <a:xfrm>
-              <a:off x="6935511" y="3312407"/>
+            <p:cNvPr id="134" name="pl134"/>
+            <p:cNvSpPr/>
+            <p:nvPr/>
+          </p:nvSpPr>
+          <p:spPr>
+            <a:xfrm>
+              <a:off x="5955366" y="3092951"/>
               <a:ext cx="175564" cy="0"/>
             </a:xfrm>
             <a:custGeom>
@@ -5888,13 +7344,13 @@
         </p:sp>
         <p:sp>
           <p:nvSpPr>
-            <p:cNvPr id="97" name="pt97"/>
-            <p:cNvSpPr/>
-            <p:nvPr/>
-          </p:nvSpPr>
-          <p:spPr>
-            <a:xfrm>
-              <a:off x="6986118" y="3275232"/>
+            <p:cNvPr id="135" name="pt135"/>
+            <p:cNvSpPr/>
+            <p:nvPr/>
+          </p:nvSpPr>
+          <p:spPr>
+            <a:xfrm>
+              <a:off x="6005973" y="3055776"/>
               <a:ext cx="74350" cy="74350"/>
             </a:xfrm>
             <a:prstGeom prst="ellipse">
@@ -5923,13 +7379,13 @@
         </p:sp>
         <p:sp>
           <p:nvSpPr>
-            <p:cNvPr id="98" name="pl98"/>
-            <p:cNvSpPr/>
-            <p:nvPr/>
-          </p:nvSpPr>
-          <p:spPr>
-            <a:xfrm>
-              <a:off x="6935511" y="3531863"/>
+            <p:cNvPr id="136" name="pl136"/>
+            <p:cNvSpPr/>
+            <p:nvPr/>
+          </p:nvSpPr>
+          <p:spPr>
+            <a:xfrm>
+              <a:off x="5955366" y="3312407"/>
               <a:ext cx="175564" cy="0"/>
             </a:xfrm>
             <a:custGeom>
@@ -5963,13 +7419,13 @@
         </p:sp>
         <p:sp>
           <p:nvSpPr>
-            <p:cNvPr id="99" name="pt99"/>
-            <p:cNvSpPr/>
-            <p:nvPr/>
-          </p:nvSpPr>
-          <p:spPr>
-            <a:xfrm>
-              <a:off x="6986118" y="3494688"/>
+            <p:cNvPr id="137" name="pt137"/>
+            <p:cNvSpPr/>
+            <p:nvPr/>
+          </p:nvSpPr>
+          <p:spPr>
+            <a:xfrm>
+              <a:off x="6005973" y="3275232"/>
               <a:ext cx="74350" cy="74350"/>
             </a:xfrm>
             <a:prstGeom prst="ellipse">
@@ -5998,13 +7454,13 @@
         </p:sp>
         <p:sp>
           <p:nvSpPr>
-            <p:cNvPr id="100" name="pl100"/>
-            <p:cNvSpPr/>
-            <p:nvPr/>
-          </p:nvSpPr>
-          <p:spPr>
-            <a:xfrm>
-              <a:off x="6935511" y="3751319"/>
+            <p:cNvPr id="138" name="pl138"/>
+            <p:cNvSpPr/>
+            <p:nvPr/>
+          </p:nvSpPr>
+          <p:spPr>
+            <a:xfrm>
+              <a:off x="5955366" y="3531863"/>
               <a:ext cx="175564" cy="0"/>
             </a:xfrm>
             <a:custGeom>
@@ -6038,13 +7494,13 @@
         </p:sp>
         <p:sp>
           <p:nvSpPr>
-            <p:cNvPr id="101" name="pt101"/>
-            <p:cNvSpPr/>
-            <p:nvPr/>
-          </p:nvSpPr>
-          <p:spPr>
-            <a:xfrm>
-              <a:off x="6986118" y="3714144"/>
+            <p:cNvPr id="139" name="pt139"/>
+            <p:cNvSpPr/>
+            <p:nvPr/>
+          </p:nvSpPr>
+          <p:spPr>
+            <a:xfrm>
+              <a:off x="6005973" y="3494688"/>
               <a:ext cx="74350" cy="74350"/>
             </a:xfrm>
             <a:prstGeom prst="ellipse">
@@ -6073,13 +7529,13 @@
         </p:sp>
         <p:sp>
           <p:nvSpPr>
-            <p:cNvPr id="102" name="pl102"/>
-            <p:cNvSpPr/>
-            <p:nvPr/>
-          </p:nvSpPr>
-          <p:spPr>
-            <a:xfrm>
-              <a:off x="6935511" y="3970775"/>
+            <p:cNvPr id="140" name="pl140"/>
+            <p:cNvSpPr/>
+            <p:nvPr/>
+          </p:nvSpPr>
+          <p:spPr>
+            <a:xfrm>
+              <a:off x="5955366" y="3751319"/>
               <a:ext cx="175564" cy="0"/>
             </a:xfrm>
             <a:custGeom>
@@ -6097,6 +7553,156 @@
             </a:custGeom>
             <a:ln w="35231" cap="flat">
               <a:solidFill>
+                <a:srgbClr val="E7298A">
+                  <a:alpha val="100000"/>
+                </a:srgbClr>
+              </a:solidFill>
+              <a:prstDash val="solid"/>
+              <a:round/>
+            </a:ln>
+          </p:spPr>
+          <p:txBody>
+            <a:bodyPr/>
+            <a:lstStyle/>
+            <a:p/>
+          </p:txBody>
+        </p:sp>
+        <p:sp>
+          <p:nvSpPr>
+            <p:cNvPr id="141" name="pt141"/>
+            <p:cNvSpPr/>
+            <p:nvPr/>
+          </p:nvSpPr>
+          <p:spPr>
+            <a:xfrm>
+              <a:off x="6005973" y="3714144"/>
+              <a:ext cx="74350" cy="74350"/>
+            </a:xfrm>
+            <a:prstGeom prst="ellipse">
+              <a:avLst/>
+            </a:prstGeom>
+            <a:solidFill>
+              <a:srgbClr val="E7298A">
+                <a:alpha val="100000"/>
+              </a:srgbClr>
+            </a:solidFill>
+            <a:ln w="14727" cap="rnd">
+              <a:solidFill>
+                <a:srgbClr val="E7298A">
+                  <a:alpha val="100000"/>
+                </a:srgbClr>
+              </a:solidFill>
+              <a:prstDash val="solid"/>
+              <a:round/>
+            </a:ln>
+          </p:spPr>
+          <p:txBody>
+            <a:bodyPr/>
+            <a:lstStyle/>
+            <a:p/>
+          </p:txBody>
+        </p:sp>
+        <p:sp>
+          <p:nvSpPr>
+            <p:cNvPr id="142" name="pl142"/>
+            <p:cNvSpPr/>
+            <p:nvPr/>
+          </p:nvSpPr>
+          <p:spPr>
+            <a:xfrm>
+              <a:off x="5955366" y="3970775"/>
+              <a:ext cx="175564" cy="0"/>
+            </a:xfrm>
+            <a:custGeom>
+              <a:avLst/>
+              <a:pathLst>
+                <a:path w="175564" h="0">
+                  <a:moveTo>
+                    <a:pt x="0" y="0"/>
+                  </a:moveTo>
+                  <a:lnTo>
+                    <a:pt x="175564" y="0"/>
+                  </a:lnTo>
+                </a:path>
+              </a:pathLst>
+            </a:custGeom>
+            <a:ln w="35231" cap="flat">
+              <a:solidFill>
+                <a:srgbClr val="F0C419">
+                  <a:alpha val="100000"/>
+                </a:srgbClr>
+              </a:solidFill>
+              <a:prstDash val="solid"/>
+              <a:round/>
+            </a:ln>
+          </p:spPr>
+          <p:txBody>
+            <a:bodyPr/>
+            <a:lstStyle/>
+            <a:p/>
+          </p:txBody>
+        </p:sp>
+        <p:sp>
+          <p:nvSpPr>
+            <p:cNvPr id="143" name="pt143"/>
+            <p:cNvSpPr/>
+            <p:nvPr/>
+          </p:nvSpPr>
+          <p:spPr>
+            <a:xfrm>
+              <a:off x="6005973" y="3933600"/>
+              <a:ext cx="74350" cy="74350"/>
+            </a:xfrm>
+            <a:prstGeom prst="ellipse">
+              <a:avLst/>
+            </a:prstGeom>
+            <a:solidFill>
+              <a:srgbClr val="F0C419">
+                <a:alpha val="100000"/>
+              </a:srgbClr>
+            </a:solidFill>
+            <a:ln w="14727" cap="rnd">
+              <a:solidFill>
+                <a:srgbClr val="F0C419">
+                  <a:alpha val="100000"/>
+                </a:srgbClr>
+              </a:solidFill>
+              <a:prstDash val="solid"/>
+              <a:round/>
+            </a:ln>
+          </p:spPr>
+          <p:txBody>
+            <a:bodyPr/>
+            <a:lstStyle/>
+            <a:p/>
+          </p:txBody>
+        </p:sp>
+        <p:sp>
+          <p:nvSpPr>
+            <p:cNvPr id="144" name="pl144"/>
+            <p:cNvSpPr/>
+            <p:nvPr/>
+          </p:nvSpPr>
+          <p:spPr>
+            <a:xfrm>
+              <a:off x="5955366" y="4190231"/>
+              <a:ext cx="175564" cy="0"/>
+            </a:xfrm>
+            <a:custGeom>
+              <a:avLst/>
+              <a:pathLst>
+                <a:path w="175564" h="0">
+                  <a:moveTo>
+                    <a:pt x="0" y="0"/>
+                  </a:moveTo>
+                  <a:lnTo>
+                    <a:pt x="175564" y="0"/>
+                  </a:lnTo>
+                </a:path>
+              </a:pathLst>
+            </a:custGeom>
+            <a:ln w="35231" cap="flat">
+              <a:solidFill>
                 <a:srgbClr val="D2B48C">
                   <a:alpha val="100000"/>
                 </a:srgbClr>
@@ -6113,13 +7719,13 @@
         </p:sp>
         <p:sp>
           <p:nvSpPr>
-            <p:cNvPr id="103" name="pt103"/>
-            <p:cNvSpPr/>
-            <p:nvPr/>
-          </p:nvSpPr>
-          <p:spPr>
-            <a:xfrm>
-              <a:off x="6986118" y="3933600"/>
+            <p:cNvPr id="145" name="pt145"/>
+            <p:cNvSpPr/>
+            <p:nvPr/>
+          </p:nvSpPr>
+          <p:spPr>
+            <a:xfrm>
+              <a:off x="6005973" y="4153056"/>
               <a:ext cx="74350" cy="74350"/>
             </a:xfrm>
             <a:prstGeom prst="ellipse">
@@ -6148,13 +7754,13 @@
         </p:sp>
         <p:sp>
           <p:nvSpPr>
-            <p:cNvPr id="104" name="tx104"/>
-            <p:cNvSpPr/>
-            <p:nvPr/>
-          </p:nvSpPr>
-          <p:spPr>
-            <a:xfrm>
-              <a:off x="7246894" y="3245793"/>
+            <p:cNvPr id="146" name="tx146"/>
+            <p:cNvSpPr/>
+            <p:nvPr/>
+          </p:nvSpPr>
+          <p:spPr>
+            <a:xfrm>
+              <a:off x="6266749" y="3026337"/>
               <a:ext cx="1360444" cy="133228"/>
             </a:xfrm>
             <a:prstGeom prst="rect">
@@ -6191,14 +7797,14 @@
         </p:sp>
         <p:sp>
           <p:nvSpPr>
-            <p:cNvPr id="105" name="tx105"/>
-            <p:cNvSpPr/>
-            <p:nvPr/>
-          </p:nvSpPr>
-          <p:spPr>
-            <a:xfrm>
-              <a:off x="7246894" y="3465249"/>
-              <a:ext cx="4107759" cy="133228"/>
+            <p:cNvPr id="147" name="tx147"/>
+            <p:cNvSpPr/>
+            <p:nvPr/>
+          </p:nvSpPr>
+          <p:spPr>
+            <a:xfrm>
+              <a:off x="6266749" y="3245793"/>
+              <a:ext cx="5087904" cy="133228"/>
             </a:xfrm>
             <a:prstGeom prst="rect">
               <a:avLst/>
@@ -6227,20 +7833,20 @@
                   <a:latin typeface="DejaVu Sans"/>
                   <a:cs typeface="DejaVu Sans"/>
                 </a:rPr>
-                <a:t>TRG → The Nature Conservancy (Heartlands)</a:t>
+                <a:t>TRG → Verdant → The Nature Conservancy (Heartlands)</a:t>
               </a:r>
             </a:p>
           </p:txBody>
         </p:sp>
         <p:sp>
           <p:nvSpPr>
-            <p:cNvPr id="106" name="tx106"/>
-            <p:cNvSpPr/>
-            <p:nvPr/>
-          </p:nvSpPr>
-          <p:spPr>
-            <a:xfrm>
-              <a:off x="7246894" y="3684705"/>
+            <p:cNvPr id="148" name="tx148"/>
+            <p:cNvSpPr/>
+            <p:nvPr/>
+          </p:nvSpPr>
+          <p:spPr>
+            <a:xfrm>
+              <a:off x="6266749" y="3465249"/>
               <a:ext cx="4038081" cy="133228"/>
             </a:xfrm>
             <a:prstGeom prst="rect">
@@ -6277,14 +7883,14 @@
         </p:sp>
         <p:sp>
           <p:nvSpPr>
-            <p:cNvPr id="107" name="tx107"/>
-            <p:cNvSpPr/>
-            <p:nvPr/>
-          </p:nvSpPr>
-          <p:spPr>
-            <a:xfrm>
-              <a:off x="7246894" y="3904161"/>
-              <a:ext cx="2613263" cy="133228"/>
+            <p:cNvPr id="149" name="tx149"/>
+            <p:cNvSpPr/>
+            <p:nvPr/>
+          </p:nvSpPr>
+          <p:spPr>
+            <a:xfrm>
+              <a:off x="6266749" y="3684705"/>
+              <a:ext cx="2132655" cy="133228"/>
             </a:xfrm>
             <a:prstGeom prst="rect">
               <a:avLst/>
@@ -6313,14 +7919,100 @@
                   <a:latin typeface="DejaVu Sans"/>
                   <a:cs typeface="DejaVu Sans"/>
                 </a:rPr>
-                <a:t>Other private → same owner</a:t>
+                <a:t>Molpus → kept (mostly)</a:t>
               </a:r>
             </a:p>
           </p:txBody>
         </p:sp>
         <p:sp>
           <p:nvSpPr>
-            <p:cNvPr id="108" name="tx108"/>
+            <p:cNvPr id="150" name="tx150"/>
+            <p:cNvSpPr/>
+            <p:nvPr/>
+          </p:nvSpPr>
+          <p:spPr>
+            <a:xfrm>
+              <a:off x="6266749" y="3904161"/>
+              <a:ext cx="1152692" cy="133228"/>
+            </a:xfrm>
+            <a:prstGeom prst="rect">
+              <a:avLst/>
+            </a:prstGeom>
+            <a:noFill/>
+          </p:spPr>
+          <p:txBody>
+            <a:bodyPr lIns="0" rIns="0" tIns="0" bIns="0" anchorCtr="1" anchor="ctr" wrap="none"/>
+            <a:lstStyle/>
+            <a:p>
+              <a:pPr algn="l" marL="0" marR="0" indent="0">
+                <a:spcBef>
+                  <a:spcPts val="0"/>
+                </a:spcBef>
+                <a:spcAft>
+                  <a:spcPts val="0"/>
+                </a:spcAft>
+              </a:pPr>
+              <a:r>
+                <a:rPr sz="1440" i="0" b="0">
+                  <a:solidFill>
+                    <a:srgbClr val="000000">
+                      <a:alpha val="100000"/>
+                    </a:srgbClr>
+                  </a:solidFill>
+                  <a:latin typeface="DejaVu Sans"/>
+                  <a:cs typeface="DejaVu Sans"/>
+                </a:rPr>
+                <a:t>Lyme → kept</a:t>
+              </a:r>
+            </a:p>
+          </p:txBody>
+        </p:sp>
+        <p:sp>
+          <p:nvSpPr>
+            <p:cNvPr id="151" name="tx151"/>
+            <p:cNvSpPr/>
+            <p:nvPr/>
+          </p:nvSpPr>
+          <p:spPr>
+            <a:xfrm>
+              <a:off x="6266749" y="4123617"/>
+              <a:ext cx="1892259" cy="133228"/>
+            </a:xfrm>
+            <a:prstGeom prst="rect">
+              <a:avLst/>
+            </a:prstGeom>
+            <a:noFill/>
+          </p:spPr>
+          <p:txBody>
+            <a:bodyPr lIns="0" rIns="0" tIns="0" bIns="0" anchorCtr="1" anchor="ctr" wrap="none"/>
+            <a:lstStyle/>
+            <a:p>
+              <a:pPr algn="l" marL="0" marR="0" indent="0">
+                <a:spcBef>
+                  <a:spcPts val="0"/>
+                </a:spcBef>
+                <a:spcAft>
+                  <a:spcPts val="0"/>
+                </a:spcAft>
+              </a:pPr>
+              <a:r>
+                <a:rPr sz="1440" i="0" b="0">
+                  <a:solidFill>
+                    <a:srgbClr val="000000">
+                      <a:alpha val="100000"/>
+                    </a:srgbClr>
+                  </a:solidFill>
+                  <a:latin typeface="DejaVu Sans"/>
+                  <a:cs typeface="DejaVu Sans"/>
+                </a:rPr>
+                <a:t>Other private → kept</a:t>
+              </a:r>
+            </a:p>
+          </p:txBody>
+        </p:sp>
+        <p:sp>
+          <p:nvSpPr>
+            <p:cNvPr id="152" name="tx152"/>
             <p:cNvSpPr/>
             <p:nvPr/>
           </p:nvSpPr>
@@ -6363,7 +8055,7 @@
         </p:sp>
         <p:sp>
           <p:nvSpPr>
-            <p:cNvPr id="109" name="tx109"/>
+            <p:cNvPr id="153" name="tx153"/>
             <p:cNvSpPr/>
             <p:nvPr/>
           </p:nvSpPr>
